--- a/docs/SPNI_BSIE_Presentation.pptx
+++ b/docs/SPNI_BSIE_Presentation.pptx
@@ -3576,7 +3576,7 @@
                 </a:solidFill>
                 <a:latin typeface="Noto Sans Thai"/>
               </a:rPr>
-              <a:t>7 กฎกราฟเครือข่าย</a:t>
+              <a:t>7 กฎตรวจจับจากเครือข่าย</a:t>
             </a:r>
           </a:p>
         </p:txBody>
@@ -3627,7 +3627,7 @@
                 </a:solidFill>
                 <a:latin typeface="Noto Sans Thai"/>
               </a:rPr>
-              <a:t>Repeated Transfers</a:t>
+              <a:t>โอนซ้ำ</a:t>
             </a:r>
             <a:r>
               <a:rPr sz="1200" b="0">
@@ -3636,7 +3636,7 @@
                 </a:solidFill>
                 <a:latin typeface="Noto Sans Thai"/>
               </a:rPr>
-              <a:t> — คู่เดิม ≥3 ครั้ง</a:t>
+              <a:t> — บัญชีคู่เดิมโอนกัน 3+ ครั้ง</a:t>
             </a:r>
           </a:p>
           <a:p>
@@ -3664,7 +3664,7 @@
                 </a:solidFill>
                 <a:latin typeface="Noto Sans Thai"/>
               </a:rPr>
-              <a:t>Fan-in</a:t>
+              <a:t>เงินเข้าหลายทาง</a:t>
             </a:r>
             <a:r>
               <a:rPr sz="1200" b="0">
@@ -3673,7 +3673,7 @@
                 </a:solidFill>
                 <a:latin typeface="Noto Sans Thai"/>
               </a:rPr>
-              <a:t> — เงินเข้าจาก ≥3 แหล่ง</a:t>
+              <a:t> — รับจาก 3+ บัญชี</a:t>
             </a:r>
           </a:p>
           <a:p>
@@ -3701,7 +3701,7 @@
                 </a:solidFill>
                 <a:latin typeface="Noto Sans Thai"/>
               </a:rPr>
-              <a:t>Fan-out</a:t>
+              <a:t>เงินออกหลายทาง</a:t>
             </a:r>
             <a:r>
               <a:rPr sz="1200" b="0">
@@ -3710,7 +3710,7 @@
                 </a:solidFill>
                 <a:latin typeface="Noto Sans Thai"/>
               </a:rPr>
-              <a:t> — เงินออกไป ≥3 เป้า</a:t>
+              <a:t> — โอนไป 3+ บัญชี</a:t>
             </a:r>
           </a:p>
           <a:p>
@@ -3738,7 +3738,7 @@
                 </a:solidFill>
                 <a:latin typeface="Noto Sans Thai"/>
               </a:rPr>
-              <a:t>Circular Paths</a:t>
+              <a:t>เงินวนกลับ</a:t>
             </a:r>
             <a:r>
               <a:rPr sz="1200" b="0">
@@ -3747,7 +3747,7 @@
                 </a:solidFill>
                 <a:latin typeface="Noto Sans Thai"/>
               </a:rPr>
-              <a:t> — เงินวน A⇄B</a:t>
+              <a:t> — A โอนให้ B แล้ว B โอนกลับ</a:t>
             </a:r>
           </a:p>
           <a:p>
@@ -3775,7 +3775,7 @@
                 </a:solidFill>
                 <a:latin typeface="Noto Sans Thai"/>
               </a:rPr>
-              <a:t>Pass-through</a:t>
+              <a:t>บัญชีผ่านมือ</a:t>
             </a:r>
             <a:r>
               <a:rPr sz="1200" b="0">
@@ -3812,7 +3812,7 @@
                 </a:solidFill>
                 <a:latin typeface="Noto Sans Thai"/>
               </a:rPr>
-              <a:t>High-degree Hub</a:t>
+              <a:t>บัญชีศูนย์กลาง</a:t>
             </a:r>
             <a:r>
               <a:rPr sz="1200" b="0">
@@ -3821,7 +3821,7 @@
                 </a:solidFill>
                 <a:latin typeface="Noto Sans Thai"/>
               </a:rPr>
-              <a:t> — เชื่อม ≥6 บัญชี</a:t>
+              <a:t> — เชื่อมกับ 6+ บัญชี</a:t>
             </a:r>
           </a:p>
           <a:p>
@@ -3849,7 +3849,7 @@
                 </a:solidFill>
                 <a:latin typeface="Noto Sans Thai"/>
               </a:rPr>
-              <a:t>Repeated Counterparty</a:t>
+              <a:t>คู่ค้าซ้ำ</a:t>
             </a:r>
             <a:r>
               <a:rPr sz="1200" b="0">
@@ -3858,7 +3858,7 @@
                 </a:solidFill>
                 <a:latin typeface="Noto Sans Thai"/>
               </a:rPr>
-              <a:t> — คนเดิมหลายวัน</a:t>
+              <a:t> — เจอคนเดิมหลายวัน</a:t>
             </a:r>
           </a:p>
         </p:txBody>
@@ -3936,7 +3936,7 @@
                 </a:solidFill>
                 <a:latin typeface="Noto Sans Thai"/>
               </a:rPr>
-              <a:t>5 รูปแบบฟอกเงิน FATF</a:t>
+              <a:t>5 รูปแบบฟอกเงินตามมาตรฐานสากล</a:t>
             </a:r>
           </a:p>
         </p:txBody>
@@ -3987,7 +3987,7 @@
                 </a:solidFill>
                 <a:latin typeface="Noto Sans Thai"/>
               </a:rPr>
-              <a:t>Smurfing</a:t>
+              <a:t>แบ่งรายการย่อย</a:t>
             </a:r>
             <a:r>
               <a:rPr sz="1200" b="0">
@@ -3996,7 +3996,7 @@
                 </a:solidFill>
                 <a:latin typeface="Noto Sans Thai"/>
               </a:rPr>
-              <a:t> — แบ่งรายการย่อย หลีกเลี่ยงเกณฑ์</a:t>
+              <a:t> — โอนทีละน้อยหลายครั้ง หลีกเลี่ยงเกณฑ์</a:t>
             </a:r>
           </a:p>
           <a:p>
@@ -4024,7 +4024,7 @@
                 </a:solidFill>
                 <a:latin typeface="Noto Sans Thai"/>
               </a:rPr>
-              <a:t>Layering</a:t>
+              <a:t>สร้างชั้นซ้อน</a:t>
             </a:r>
             <a:r>
               <a:rPr sz="1200" b="0">
@@ -4033,7 +4033,7 @@
                 </a:solidFill>
                 <a:latin typeface="Noto Sans Thai"/>
               </a:rPr>
-              <a:t> — สร้างชั้นธุรกรรมซ้อนทับ</a:t>
+              <a:t> — โอนผ่านหลายบัญชีเพื่อปิดบัง</a:t>
             </a:r>
           </a:p>
           <a:p>
@@ -4061,7 +4061,7 @@
                 </a:solidFill>
                 <a:latin typeface="Noto Sans Thai"/>
               </a:rPr>
-              <a:t>Rapid Movement</a:t>
+              <a:t>เงินเข้า-ออกเร็ว</a:t>
             </a:r>
             <a:r>
               <a:rPr sz="1200" b="0">
@@ -4070,7 +4070,7 @@
                 </a:solidFill>
                 <a:latin typeface="Noto Sans Thai"/>
               </a:rPr>
-              <a:t> — เข้า-ออกภายใน 24 ชม.</a:t>
+              <a:t> — เข้ามาแล้วออกภายใน 24 ชม.</a:t>
             </a:r>
           </a:p>
           <a:p>
@@ -4098,7 +4098,7 @@
                 </a:solidFill>
                 <a:latin typeface="Noto Sans Thai"/>
               </a:rPr>
-              <a:t>Dormant Activation</a:t>
+              <a:t>บัญชีนิ่งแล้วตื่น</a:t>
             </a:r>
             <a:r>
               <a:rPr sz="1200" b="0">
@@ -4107,7 +4107,7 @@
                 </a:solidFill>
                 <a:latin typeface="Noto Sans Thai"/>
               </a:rPr>
-              <a:t> — บัญชีนิ่ง→ใช้ทันที</a:t>
+              <a:t> — ไม่ใช้นานแล้วมีเงินเข้าทันที</a:t>
             </a:r>
           </a:p>
           <a:p>
@@ -4135,7 +4135,7 @@
                 </a:solidFill>
                 <a:latin typeface="Noto Sans Thai"/>
               </a:rPr>
-              <a:t>Round-tripping</a:t>
+              <a:t>เงินวนกลับ</a:t>
             </a:r>
             <a:r>
               <a:rPr sz="1200" b="0">
@@ -4144,7 +4144,7 @@
                 </a:solidFill>
                 <a:latin typeface="Noto Sans Thai"/>
               </a:rPr>
-              <a:t> — เงินวนกลับแหล่งเดิม</a:t>
+              <a:t> — ส่งออกไปแล้ววนกลับมาที่เดิม</a:t>
             </a:r>
           </a:p>
         </p:txBody>
@@ -4222,7 +4222,7 @@
                 </a:solidFill>
                 <a:latin typeface="Noto Sans Thai"/>
               </a:rPr>
-              <a:t>4 วิธีทางสถิติ</a:t>
+              <a:t>4 วิธีตรวจจับทางคณิตศาสตร์</a:t>
             </a:r>
           </a:p>
         </p:txBody>
@@ -4273,7 +4273,7 @@
                 </a:solidFill>
                 <a:latin typeface="Noto Sans Thai"/>
               </a:rPr>
-              <a:t>Z-score</a:t>
+              <a:t>ค่าเบี่ยงเบน</a:t>
             </a:r>
             <a:r>
               <a:rPr sz="1200" b="0">
@@ -4282,7 +4282,7 @@
                 </a:solidFill>
                 <a:latin typeface="Noto Sans Thai"/>
               </a:rPr>
-              <a:t> — เบี่ยงเบน &gt;Nσ</a:t>
+              <a:t> — ยอดเงินผิดปกติจากค่าเฉลี่ย</a:t>
             </a:r>
           </a:p>
           <a:p>
@@ -4310,7 +4310,7 @@
                 </a:solidFill>
                 <a:latin typeface="Noto Sans Thai"/>
               </a:rPr>
-              <a:t>IQR</a:t>
+              <a:t>ค่าผิดปกติ</a:t>
             </a:r>
             <a:r>
               <a:rPr sz="1200" b="0">
@@ -4319,7 +4319,7 @@
                 </a:solidFill>
                 <a:latin typeface="Noto Sans Thai"/>
               </a:rPr>
-              <a:t> — Q1-1.5×IQR ถึง Q3+1.5×IQR</a:t>
+              <a:t> — ยอดเงินที่สูง/ต่ำกว่าพิสัยปกติ</a:t>
             </a:r>
           </a:p>
           <a:p>
@@ -4347,7 +4347,7 @@
                 </a:solidFill>
                 <a:latin typeface="Noto Sans Thai"/>
               </a:rPr>
-              <a:t>Benford's Law</a:t>
+              <a:t>กฎตัวเลขหลักแรก</a:t>
             </a:r>
             <a:r>
               <a:rPr sz="1200" b="0">
@@ -4356,7 +4356,7 @@
                 </a:solidFill>
                 <a:latin typeface="Noto Sans Thai"/>
               </a:rPr>
-              <a:t> — หลักแรกผิดปกติ</a:t>
+              <a:t> — ตัวเลขตั้งต้นไม่เป็นธรรมชาติ</a:t>
             </a:r>
           </a:p>
           <a:p>
@@ -4384,7 +4384,7 @@
                 </a:solidFill>
                 <a:latin typeface="Noto Sans Thai"/>
               </a:rPr>
-              <a:t>Moving Average</a:t>
+              <a:t>ค่าเฉลี่ยเคลื่อนที่</a:t>
             </a:r>
             <a:r>
               <a:rPr sz="1200" b="0">
@@ -4393,7 +4393,7 @@
                 </a:solidFill>
                 <a:latin typeface="Noto Sans Thai"/>
               </a:rPr>
-              <a:t> — เบี่ยงจากค่าเฉลี่ย 30 รายการ</a:t>
+              <a:t> — เปรียบเทียบกับ 30 รายการก่อน</a:t>
             </a:r>
           </a:p>
         </p:txBody>
@@ -4489,7 +4489,7 @@
                 </a:solidFill>
                 <a:latin typeface="Noto Sans Thai"/>
               </a:rPr>
-              <a:t>การวิเคราะห์ข้ามบัญชี + Investigation Desk + รายงาน</a:t>
+              <a:t>การวิเคราะห์ข้ามบัญชี + โต๊ะทำงานสืบสวน + รายงาน</a:t>
             </a:r>
           </a:p>
         </p:txBody>
@@ -4569,7 +4569,7 @@
                 </a:solidFill>
                 <a:latin typeface="Noto Sans Thai"/>
               </a:rPr>
-              <a:t>Cross-Account Analysis</a:t>
+              <a:t>วิเคราะห์ข้ามบัญชี</a:t>
             </a:r>
           </a:p>
         </p:txBody>
@@ -4620,7 +4620,7 @@
                 </a:solidFill>
                 <a:latin typeface="Noto Sans Thai"/>
               </a:rPr>
-              <a:t>Fund Flow</a:t>
+              <a:t>ดูเส้นทางเงิน</a:t>
             </a:r>
             <a:r>
               <a:rPr sz="1200" b="0">
@@ -4629,7 +4629,7 @@
                 </a:solidFill>
                 <a:latin typeface="Noto Sans Thai"/>
               </a:rPr>
-              <a:t> — เงินเข้า/ออกของบัญชีใดก็ได้</a:t>
+              <a:t> — ดูเงินเข้า/ออกของบัญชีใดก็ได้</a:t>
             </a:r>
           </a:p>
           <a:p>
@@ -4657,7 +4657,7 @@
                 </a:solidFill>
                 <a:latin typeface="Noto Sans Thai"/>
               </a:rPr>
-              <a:t>Pairwise</a:t>
+              <a:t>เปรียบเทียบคู่</a:t>
             </a:r>
             <a:r>
               <a:rPr sz="1200" b="0">
@@ -4666,7 +4666,7 @@
                 </a:solidFill>
                 <a:latin typeface="Noto Sans Thai"/>
               </a:rPr>
-              <a:t> — ธุรกรรมทั้งหมดระหว่าง 2 บัญชี</a:t>
+              <a:t> — ดูธุรกรรมทั้งหมดระหว่าง 2 บัญชี</a:t>
             </a:r>
           </a:p>
           <a:p>
@@ -4694,7 +4694,7 @@
                 </a:solidFill>
                 <a:latin typeface="Noto Sans Thai"/>
               </a:rPr>
-              <a:t>BFS Path Finder</a:t>
+              <a:t>ติดตามเส้นทาง</a:t>
             </a:r>
             <a:r>
               <a:rPr sz="1200" b="0">
@@ -4703,7 +4703,7 @@
                 </a:solidFill>
                 <a:latin typeface="Noto Sans Thai"/>
               </a:rPr>
-              <a:t> — A→B→C→D สูงสุด </a:t>
+              <a:t> — ตามเงินจาก A ไป B ไป C ได้ถึง </a:t>
             </a:r>
             <a:r>
               <a:rPr sz="1200" b="1">
@@ -4740,7 +4740,7 @@
                 </a:solidFill>
                 <a:latin typeface="Noto Sans Thai"/>
               </a:rPr>
-              <a:t>Bulk Cross-Match</a:t>
+              <a:t>จับคู่ข้ามบัญชี</a:t>
             </a:r>
             <a:r>
               <a:rPr sz="1200" b="0">
@@ -4749,7 +4749,7 @@
                 </a:solidFill>
                 <a:latin typeface="Noto Sans Thai"/>
               </a:rPr>
-              <a:t> — จับคู่ข้ามทุกบัญชีพร้อมกัน</a:t>
+              <a:t> — ตรวจทุกบัญชีพร้อมกันในครั้งเดียว</a:t>
             </a:r>
           </a:p>
           <a:p>
@@ -4777,7 +4777,7 @@
                 </a:solidFill>
                 <a:latin typeface="Noto Sans Thai"/>
               </a:rPr>
-              <a:t>Multi-period</a:t>
+              <a:t>เปรียบเทียบช่วงเวลา</a:t>
             </a:r>
             <a:r>
               <a:rPr sz="1200" b="0">
@@ -4786,7 +4786,7 @@
                 </a:solidFill>
                 <a:latin typeface="Noto Sans Thai"/>
               </a:rPr>
-              <a:t> — เปรียบเทียบ 2 ช่วงเวลา</a:t>
+              <a:t> — เทียบ 2 ช่วงเวลาหาความต่าง</a:t>
             </a:r>
           </a:p>
         </p:txBody>
@@ -4866,7 +4866,7 @@
                 </a:solidFill>
                 <a:latin typeface="Noto Sans Thai"/>
               </a:rPr>
-              <a:t>Investigation Desk — 13 แท็บ</a:t>
+              <a:t>โต๊ะทำงานสืบสวน — 13 เครื่องมือ</a:t>
             </a:r>
           </a:p>
         </p:txBody>
@@ -4911,13 +4911,22 @@
               <a:t>● </a:t>
             </a:r>
             <a:r>
+              <a:rPr sz="1200" b="0">
+                <a:solidFill>
+                  <a:srgbClr val="1A202C"/>
+                </a:solidFill>
+                <a:latin typeface="Noto Sans Thai"/>
+              </a:rPr>
+              <a:t>ฐานข้อมูล │ ไฟล์ │ ประมวลผล │ </a:t>
+            </a:r>
+            <a:r>
               <a:rPr sz="1200" b="1">
                 <a:solidFill>
                   <a:srgbClr val="1A202C"/>
                 </a:solidFill>
                 <a:latin typeface="Noto Sans Thai"/>
               </a:rPr>
-              <a:t>Database</a:t>
+              <a:t>บัญชี</a:t>
             </a:r>
             <a:r>
               <a:rPr sz="1200" b="0">
@@ -4926,7 +4935,7 @@
                 </a:solidFill>
                 <a:latin typeface="Noto Sans Thai"/>
               </a:rPr>
-              <a:t> │ Files │ Parser Runs │ </a:t>
+              <a:t> │ </a:t>
             </a:r>
             <a:r>
               <a:rPr sz="1200" b="1">
@@ -4935,25 +4944,7 @@
                 </a:solidFill>
                 <a:latin typeface="Noto Sans Thai"/>
               </a:rPr>
-              <a:t>Accounts</a:t>
-            </a:r>
-            <a:r>
-              <a:rPr sz="1200" b="0">
-                <a:solidFill>
-                  <a:srgbClr val="1A202C"/>
-                </a:solidFill>
-                <a:latin typeface="Noto Sans Thai"/>
-              </a:rPr>
-              <a:t> │ </a:t>
-            </a:r>
-            <a:r>
-              <a:rPr sz="1200" b="1">
-                <a:solidFill>
-                  <a:srgbClr val="1A202C"/>
-                </a:solidFill>
-                <a:latin typeface="Noto Sans Thai"/>
-              </a:rPr>
-              <a:t>Search</a:t>
+              <a:t>ค้นหา</a:t>
             </a:r>
           </a:p>
           <a:p>
@@ -4981,7 +4972,7 @@
                 </a:solidFill>
                 <a:latin typeface="Noto Sans Thai"/>
               </a:rPr>
-              <a:t>Alerts</a:t>
+              <a:t>แจ้งเตือน</a:t>
             </a:r>
             <a:r>
               <a:rPr sz="1200" b="0">
@@ -4999,7 +4990,7 @@
                 </a:solidFill>
                 <a:latin typeface="Noto Sans Thai"/>
               </a:rPr>
-              <a:t>Cross-Account</a:t>
+              <a:t>ข้ามบัญชี</a:t>
             </a:r>
             <a:r>
               <a:rPr sz="1200" b="0">
@@ -5017,7 +5008,7 @@
                 </a:solidFill>
                 <a:latin typeface="Noto Sans Thai"/>
               </a:rPr>
-              <a:t>Link Chart</a:t>
+              <a:t>แผนภาพเชื่อมโยง</a:t>
             </a:r>
             <a:r>
               <a:rPr sz="1200" b="0">
@@ -5035,7 +5026,7 @@
                 </a:solidFill>
                 <a:latin typeface="Noto Sans Thai"/>
               </a:rPr>
-              <a:t>Timeline</a:t>
+              <a:t>ลำดับเวลา</a:t>
             </a:r>
           </a:p>
           <a:p>
@@ -5063,7 +5054,7 @@
                 </a:solidFill>
                 <a:latin typeface="Noto Sans Thai"/>
               </a:rPr>
-              <a:t>Duplicates │ Matches │ </a:t>
+              <a:t>ข้อมูลซ้ำ │ จับคู่ │ </a:t>
             </a:r>
             <a:r>
               <a:rPr sz="1200" b="1">
@@ -5072,7 +5063,7 @@
                 </a:solidFill>
                 <a:latin typeface="Noto Sans Thai"/>
               </a:rPr>
-              <a:t>Audit</a:t>
+              <a:t>ตรวจสอบย้อนหลัง</a:t>
             </a:r>
             <a:r>
               <a:rPr sz="1200" b="0">
@@ -5090,7 +5081,7 @@
                 </a:solidFill>
                 <a:latin typeface="Noto Sans Thai"/>
               </a:rPr>
-              <a:t>Exports</a:t>
+              <a:t>ส่งออก</a:t>
             </a:r>
           </a:p>
         </p:txBody>
@@ -5170,7 +5161,7 @@
                 </a:solidFill>
                 <a:latin typeface="Noto Sans Thai"/>
               </a:rPr>
-              <a:t>รายงานพร้อมใช้งาน — 6 รูปแบบ</a:t>
+              <a:t>รายงานพร้อมใช้ — 6 รูปแบบ</a:t>
             </a:r>
           </a:p>
         </p:txBody>
@@ -5345,7 +5336,7 @@
                 </a:solidFill>
                 <a:latin typeface="Noto Sans Thai"/>
               </a:rPr>
-              <a:t>i2 Chart (.anx)</a:t>
+              <a:t>แผนภาพ i2 (.anx)</a:t>
             </a:r>
           </a:p>
         </p:txBody>
@@ -5415,7 +5406,7 @@
                 </a:solidFill>
                 <a:latin typeface="Noto Sans Thai"/>
               </a:rPr>
-              <a:t>i2 Import (.csv+.ximp)</a:t>
+              <a:t>นำเข้า i2 (.csv+.ximp)</a:t>
             </a:r>
           </a:p>
         </p:txBody>
@@ -5450,7 +5441,7 @@
                 </a:solidFill>
                 <a:latin typeface="Noto Sans Thai"/>
               </a:rPr>
-              <a:t>CSV data 29 คอลัมน์ + XML spec สำหรับ import</a:t>
+              <a:t>ข้อมูล 29 คอลัมน์ + ไฟล์นำเข้า i2</a:t>
             </a:r>
           </a:p>
         </p:txBody>
@@ -5686,7 +5677,7 @@
                 </a:solidFill>
                 <a:latin typeface="Noto Sans Thai"/>
               </a:rPr>
-              <a:t>ความปลอดภัย, Chain of Custody, ภาษาไทย</a:t>
+              <a:t>ความปลอดภัย, สายโซ่หลักฐาน, ภาษาไทย</a:t>
             </a:r>
           </a:p>
         </p:txBody>
@@ -5764,7 +5755,7 @@
                 </a:solidFill>
                 <a:latin typeface="Noto Sans Thai"/>
               </a:rPr>
-              <a:t>Authentication</a:t>
+              <a:t>ยืนยันตัวตน</a:t>
             </a:r>
           </a:p>
         </p:txBody>
@@ -5815,7 +5806,7 @@
                 </a:solidFill>
                 <a:latin typeface="Noto Sans Thai"/>
               </a:rPr>
-              <a:t>JWT</a:t>
+              <a:t>ล็อกอินด้วยรหัส</a:t>
             </a:r>
             <a:r>
               <a:rPr sz="1100" b="0">
@@ -5824,7 +5815,7 @@
                 </a:solidFill>
                 <a:latin typeface="Noto Sans Thai"/>
               </a:rPr>
-              <a:t> tokens + 3 ระดับ: Admin/Analyst/Viewer</a:t>
+              <a:t> + 3 ระดับ: ผู้ดูแล/นักวิเคราะห์/ผู้ชม</a:t>
             </a:r>
           </a:p>
           <a:p>
@@ -5852,7 +5843,7 @@
                 </a:solidFill>
                 <a:latin typeface="Noto Sans Thai"/>
               </a:rPr>
-              <a:t>PBKDF2-SHA256</a:t>
+              <a:t>เข้ารหัสรหัสผ่าน</a:t>
             </a:r>
             <a:r>
               <a:rPr sz="1100" b="0">
@@ -5861,7 +5852,7 @@
                 </a:solidFill>
                 <a:latin typeface="Noto Sans Thai"/>
               </a:rPr>
-              <a:t> 100,000 iterations</a:t>
+              <a:t> 100,000 รอบ (ปลอดภัยสูง)</a:t>
             </a:r>
           </a:p>
           <a:p>
@@ -5889,7 +5880,7 @@
                 </a:solidFill>
                 <a:latin typeface="Noto Sans Thai"/>
               </a:rPr>
-              <a:t>Rate Limiting</a:t>
+              <a:t>จำกัดการล็อกอินผิด</a:t>
             </a:r>
             <a:r>
               <a:rPr sz="1100" b="0">
@@ -5898,7 +5889,7 @@
                 </a:solidFill>
                 <a:latin typeface="Noto Sans Thai"/>
               </a:rPr>
-              <a:t> — 10 req/min login</a:t>
+              <a:t> — ป้องกันเดารหัส</a:t>
             </a:r>
           </a:p>
           <a:p>
@@ -5926,7 +5917,7 @@
                 </a:solidFill>
                 <a:latin typeface="Noto Sans Thai"/>
               </a:rPr>
-              <a:t>Configurable</a:t>
+              <a:t>ตั้งค่าได้</a:t>
             </a:r>
             <a:r>
               <a:rPr sz="1100" b="0">
@@ -5935,7 +5926,7 @@
                 </a:solidFill>
                 <a:latin typeface="Noto Sans Thai"/>
               </a:rPr>
-              <a:t> — BSIE_AUTH_REQUIRED env</a:t>
+              <a:t> — เปิด/ปิดระบบยืนยันตัวตน</a:t>
             </a:r>
           </a:p>
         </p:txBody>
@@ -6013,7 +6004,7 @@
                 </a:solidFill>
                 <a:latin typeface="Noto Sans Thai"/>
               </a:rPr>
-              <a:t>Security Headers</a:t>
+              <a:t>ป้องกันการโจมตี</a:t>
             </a:r>
           </a:p>
         </p:txBody>
@@ -6064,16 +6055,7 @@
                 </a:solidFill>
                 <a:latin typeface="Noto Sans Thai"/>
               </a:rPr>
-              <a:t>X-Frame-Options</a:t>
-            </a:r>
-            <a:r>
-              <a:rPr sz="1100" b="0">
-                <a:solidFill>
-                  <a:srgbClr val="FFFFFF"/>
-                </a:solidFill>
-                <a:latin typeface="Noto Sans Thai"/>
-              </a:rPr>
-              <a:t>: DENY</a:t>
+              <a:t>ป้องกันฝังในเว็บอื่น</a:t>
             </a:r>
           </a:p>
           <a:p>
@@ -6101,16 +6083,7 @@
                 </a:solidFill>
                 <a:latin typeface="Noto Sans Thai"/>
               </a:rPr>
-              <a:t>X-Content-Type-Options</a:t>
-            </a:r>
-            <a:r>
-              <a:rPr sz="1100" b="0">
-                <a:solidFill>
-                  <a:srgbClr val="FFFFFF"/>
-                </a:solidFill>
-                <a:latin typeface="Noto Sans Thai"/>
-              </a:rPr>
-              <a:t>: nosniff</a:t>
+              <a:t>ป้องกันปลอมแปลงไฟล์</a:t>
             </a:r>
           </a:p>
           <a:p>
@@ -6138,16 +6111,7 @@
                 </a:solidFill>
                 <a:latin typeface="Noto Sans Thai"/>
               </a:rPr>
-              <a:t>Referrer-Policy</a:t>
-            </a:r>
-            <a:r>
-              <a:rPr sz="1100" b="0">
-                <a:solidFill>
-                  <a:srgbClr val="FFFFFF"/>
-                </a:solidFill>
-                <a:latin typeface="Noto Sans Thai"/>
-              </a:rPr>
-              <a:t>: no-referrer</a:t>
+              <a:t>ไม่เปิดเผยที่มา</a:t>
             </a:r>
           </a:p>
           <a:p>
@@ -6175,7 +6139,7 @@
                 </a:solidFill>
                 <a:latin typeface="Noto Sans Thai"/>
               </a:rPr>
-              <a:t>Upload Allowlist</a:t>
+              <a:t>จำกัดประเภทไฟล์</a:t>
             </a:r>
             <a:r>
               <a:rPr sz="1100" b="0">
@@ -6184,7 +6148,7 @@
                 </a:solidFill>
                 <a:latin typeface="Noto Sans Thai"/>
               </a:rPr>
-              <a:t> — .xlsx/.pdf/.csv/.png</a:t>
+              <a:t> — เฉพาะ Excel/PDF/CSV/รูปภาพ</a:t>
             </a:r>
           </a:p>
           <a:p>
@@ -6212,7 +6176,7 @@
                 </a:solidFill>
                 <a:latin typeface="Noto Sans Thai"/>
               </a:rPr>
-              <a:t>Max Body Size</a:t>
+              <a:t>จำกัดขนาดไฟล์</a:t>
             </a:r>
             <a:r>
               <a:rPr sz="1100" b="0">
@@ -6221,7 +6185,7 @@
                 </a:solidFill>
                 <a:latin typeface="Noto Sans Thai"/>
               </a:rPr>
-              <a:t>: 50 MB</a:t>
+              <a:t> — ไม่เกิน 50 MB</a:t>
             </a:r>
           </a:p>
         </p:txBody>
@@ -6299,7 +6263,7 @@
                 </a:solidFill>
                 <a:latin typeface="Noto Sans Thai"/>
               </a:rPr>
-              <a:t>Chain of Custody</a:t>
+              <a:t>สายโซ่หลักฐาน</a:t>
             </a:r>
           </a:p>
         </p:txBody>
@@ -6350,7 +6314,7 @@
                 </a:solidFill>
                 <a:latin typeface="Noto Sans Thai"/>
               </a:rPr>
-              <a:t>Audit Trail</a:t>
+              <a:t>ร่องรอยตรวจสอบ</a:t>
             </a:r>
             <a:r>
               <a:rPr sz="1100" b="0">
@@ -6359,7 +6323,7 @@
                 </a:solidFill>
                 <a:latin typeface="Noto Sans Thai"/>
               </a:rPr>
-              <a:t> — ใคร/ทำอะไร/เมื่อไหร่</a:t>
+              <a:t> — บันทึกว่าใคร/ทำอะไร/เมื่อไหร่</a:t>
             </a:r>
           </a:p>
           <a:p>
@@ -6387,7 +6351,7 @@
                 </a:solidFill>
                 <a:latin typeface="Noto Sans Thai"/>
               </a:rPr>
-              <a:t>Chain of Custody</a:t>
+              <a:t>สายโซ่หลักฐาน</a:t>
             </a:r>
             <a:r>
               <a:rPr sz="1100" b="0">
@@ -6396,7 +6360,7 @@
                 </a:solidFill>
                 <a:latin typeface="Noto Sans Thai"/>
               </a:rPr>
-              <a:t> — ประวัติครบถ้วน</a:t>
+              <a:t> — ประวัติครบถ้วนใช้เป็นหลักฐานได้</a:t>
             </a:r>
           </a:p>
           <a:p>
@@ -6424,7 +6388,16 @@
                 </a:solidFill>
                 <a:latin typeface="Noto Sans Thai"/>
               </a:rPr>
-              <a:t>/api/audit-trail/{type}/{id}</a:t>
+              <a:t>เรียกดูประวัติ</a:t>
+            </a:r>
+            <a:r>
+              <a:rPr sz="1100" b="0">
+                <a:solidFill>
+                  <a:srgbClr val="FFFFFF"/>
+                </a:solidFill>
+                <a:latin typeface="Noto Sans Thai"/>
+              </a:rPr>
+              <a:t> ผ่านระบบได้ทุกเมื่อ</a:t>
             </a:r>
           </a:p>
           <a:p>
@@ -6452,7 +6425,7 @@
                 </a:solidFill>
                 <a:latin typeface="Noto Sans Thai"/>
               </a:rPr>
-              <a:t>SHA-256</a:t>
+              <a:t>ตรวจสอบความถูกต้อง</a:t>
             </a:r>
             <a:r>
               <a:rPr sz="1100" b="0">
@@ -6461,7 +6434,7 @@
                 </a:solidFill>
                 <a:latin typeface="Noto Sans Thai"/>
               </a:rPr>
-              <a:t> file integrity verification</a:t>
+              <a:t> ของไฟล์หลักฐาน</a:t>
             </a:r>
           </a:p>
           <a:p>
@@ -6489,7 +6462,7 @@
                 </a:solidFill>
                 <a:latin typeface="Noto Sans Thai"/>
               </a:rPr>
-              <a:t>File Metadata</a:t>
+              <a:t>ตรวจข้อมูลไฟล์</a:t>
             </a:r>
             <a:r>
               <a:rPr sz="1100" b="0">
@@ -6498,7 +6471,7 @@
                 </a:solidFill>
                 <a:latin typeface="Noto Sans Thai"/>
               </a:rPr>
-              <a:t> — forensic checks</a:t>
+              <a:t> — ใช้ทางนิติวิทยาศาสตร์</a:t>
             </a:r>
           </a:p>
         </p:txBody>
@@ -6578,8 +6551,8 @@
                 </a:solidFill>
                 <a:latin typeface="Noto Sans Thai"/>
               </a:rPr>
-              <a:t>ภาษาไทยเต็มระบบ: UI สลับ ไทย/อังกฤษ │ ~500 คีย์แปลภาษา │ TH Sarabun New ทุกรายงาน
-NLP ชื่อไทย/เบอร์/บัตร ปชช./PromptPay │ 244 ชุดทดสอบ (212 backend + 32 frontend)</a:t>
+              <a:t>ภาษาไทยเต็มระบบ: สลับ ไทย/อังกฤษ ได้ทั้งระบบ │ แปลแล้วกว่า 500 จุด │ ฟอนต์ TH Sarabun New ทุกรายงาน
+ดึงชื่อไทย/เบอร์โทร/บัตร ปชช./พร้อมเพย์อัตโนมัติ │ ทดสอบแล้ว 244 ชุด</a:t>
             </a:r>
           </a:p>
         </p:txBody>
@@ -6675,7 +6648,7 @@
                 </a:solidFill>
                 <a:latin typeface="Noto Sans Thai"/>
               </a:rPr>
-              <a:t>ทำไมต้อง Local LLM — ห้ามใช้ Cloud AI</a:t>
+              <a:t>ทำไมต้องใช้ AI ภายในเครื่อง — ห้ามใช้ AI ภายนอก</a:t>
             </a:r>
           </a:p>
         </p:txBody>
@@ -6843,15 +6816,6 @@
               </a:rPr>
               <a:t>พ.ร.บ. คุ้มครองข้อมูลส่วนบุคคล</a:t>
             </a:r>
-            <a:r>
-              <a:rPr sz="1300" b="0">
-                <a:solidFill>
-                  <a:srgbClr val="FFFFFF"/>
-                </a:solidFill>
-                <a:latin typeface="Noto Sans Thai"/>
-              </a:rPr>
-              <a:t> (PDPA)</a:t>
-            </a:r>
           </a:p>
           <a:p>
             <a:pPr>
@@ -6878,7 +6842,7 @@
                 </a:solidFill>
                 <a:latin typeface="Noto Sans Thai"/>
               </a:rPr>
-              <a:t>Training Data Risk</a:t>
+              <a:t>เสี่ยงถูกนำข้อมูลไปเรียนรู้</a:t>
             </a:r>
             <a:r>
               <a:rPr sz="1300" b="0">
@@ -6887,7 +6851,7 @@
                 </a:solidFill>
                 <a:latin typeface="Noto Sans Thai"/>
               </a:rPr>
-              <a:t> — Cloud LLM อาจนำข้อมูลไปเรียนรู้</a:t>
+              <a:t> — AI ภายนอกอาจเอาข้อมูลคดีไปใช้</a:t>
             </a:r>
           </a:p>
           <a:p>
@@ -6915,7 +6879,7 @@
                 </a:solidFill>
                 <a:latin typeface="Noto Sans Thai"/>
               </a:rPr>
-              <a:t>Chain of Custody</a:t>
+              <a:t>สายโซ่หลักฐาน</a:t>
             </a:r>
             <a:r>
               <a:rPr sz="1300" b="0">
@@ -6961,7 +6925,7 @@
                 </a:solidFill>
                 <a:latin typeface="Noto Sans Thai"/>
               </a:rPr>
-              <a:t> — ข้อมูลอยู่ในโครงข่ายภายใน</a:t>
+              <a:t> — ข้อมูลสืบสวนต้องอยู่ในเครือข่ายภายใน</a:t>
             </a:r>
           </a:p>
           <a:p>
@@ -6989,7 +6953,7 @@
                 </a:solidFill>
                 <a:latin typeface="Noto Sans Thai"/>
               </a:rPr>
-              <a:t>ป้องกันรั่วไหล</a:t>
+              <a:t>ป้องกันข้อมูลรั่วไหล</a:t>
             </a:r>
             <a:r>
               <a:rPr sz="1300" b="0">
@@ -7076,7 +7040,7 @@
                 </a:solidFill>
                 <a:latin typeface="Noto Sans Thai"/>
               </a:rPr>
-              <a:t>Local LLM ทำอะไรได้</a:t>
+              <a:t>AI ภายในเครื่องทำอะไรได้</a:t>
             </a:r>
           </a:p>
         </p:txBody>
@@ -7127,7 +7091,7 @@
                 </a:solidFill>
                 <a:latin typeface="Noto Sans Thai"/>
               </a:rPr>
-              <a:t>สรุปคดีอัตโนมัติ</a:t>
+              <a:t>สรุปคดีให้อัตโนมัติ</a:t>
             </a:r>
             <a:r>
               <a:rPr sz="1300" b="0">
@@ -7136,7 +7100,7 @@
                 </a:solidFill>
                 <a:latin typeface="Noto Sans Thai"/>
               </a:rPr>
-              <a:t> — พบเงินเข้า 15 บัญชี 3.2 ล.</a:t>
+              <a:t> — เช่น 'พบเงินเข้าจาก 15 บัญชี รวม 3.2 ล้านบาท'</a:t>
             </a:r>
           </a:p>
           <a:p>
@@ -7173,7 +7137,7 @@
                 </a:solidFill>
                 <a:latin typeface="Noto Sans Thai"/>
               </a:rPr>
-              <a:t> — บัญชีนี้มีธุรกรรมเกิน 1 แสน?</a:t>
+              <a:t> — เช่น 'บัญชีนี้มีธุรกรรมเกิน 1 แสนกี่รายการ?'</a:t>
             </a:r>
           </a:p>
           <a:p>
@@ -7210,7 +7174,7 @@
                 </a:solidFill>
                 <a:latin typeface="Noto Sans Thai"/>
               </a:rPr>
-              <a:t> — ช่วย classify ที่ไม่มั่นใจ</a:t>
+              <a:t> — ช่วยตัดสินรายการที่ระบบไม่มั่นใจ</a:t>
             </a:r>
           </a:p>
           <a:p>
@@ -7247,7 +7211,7 @@
                 </a:solidFill>
                 <a:latin typeface="Noto Sans Thai"/>
               </a:rPr>
-              <a:t> — structuring, smurfing?</a:t>
+              <a:t> — มีการแบ่งรายการย่อยหรือไม่?</a:t>
             </a:r>
           </a:p>
           <a:p>
@@ -7275,7 +7239,7 @@
                 </a:solidFill>
                 <a:latin typeface="Noto Sans Thai"/>
               </a:rPr>
-              <a:t>ร่าง STR/CTR</a:t>
+              <a:t>ร่างรายงาน ปปง.</a:t>
             </a:r>
             <a:r>
               <a:rPr sz="1300" b="0">
@@ -7284,7 +7248,7 @@
                 </a:solidFill>
                 <a:latin typeface="Noto Sans Thai"/>
               </a:rPr>
-              <a:t> narrative อัตโนมัติ</a:t>
+              <a:t> ให้อัตโนมัติ</a:t>
             </a:r>
           </a:p>
         </p:txBody>
@@ -7319,9 +7283,9 @@
                 </a:solidFill>
                 <a:latin typeface="Noto Sans Thai"/>
               </a:rPr>
-              <a:t>แนะนำ: Ollama + Llama 3.1 70B / Typhoon
-GPU: NVIDIA RTX 4090 (24GB) หรือ A6000 (48GB)
-ติดตั้งง่าย — API เหมือน OpenAI</a:t>
+              <a:t>แนะนำ: ใช้โปรแกรม Ollama + โมเดล Llama 3.1 หรือ Typhoon (เข้าใจภาษาไทย)
+ต้องมีการ์ดจอ: NVIDIA RTX 4090 หรือ A6000
+ติดตั้งง่าย — ใช้งานได้ทันที</a:t>
             </a:r>
           </a:p>
         </p:txBody>
@@ -7417,7 +7381,7 @@
                 </a:solidFill>
                 <a:latin typeface="Noto Sans Thai"/>
               </a:rPr>
-              <a:t>โครงสร้างพื้นฐาน — Phase 1 ถึง 4</a:t>
+              <a:t>โครงสร้างพื้นฐาน — เฟส 1 ถึง 4</a:t>
             </a:r>
           </a:p>
         </p:txBody>
@@ -7497,7 +7461,7 @@
                 </a:solidFill>
                 <a:latin typeface="Noto Sans Thai"/>
               </a:rPr>
-              <a:t>Phase 1: Standalone (ฟรี)</a:t>
+              <a:t>เฟส 1: เครื่องเดี่ยว (ฟรี)</a:t>
             </a:r>
           </a:p>
         </p:txBody>
@@ -7532,12 +7496,9 @@
                 </a:solidFill>
                 <a:latin typeface="Noto Sans Thai"/>
               </a:rPr>
-              <a:t>PC/Mac พนักงานสอบสวน
-  └── BSIE (localhost:8757)
-        ├── FastAPI backend
-        ├── React frontend
-        └── SQLite database
-ไม่ต้องใช้ server ใดๆ</a:t>
+              <a:t>ใช้คอมพิวเตอร์ที่มี → เปิดระบบ BSIE
+ทำงานบนเครื่องเดียว ไม่ต้องต่อเน็ต
+ไม่ต้องซื้อเซิร์ฟเวอร์</a:t>
             </a:r>
           </a:p>
         </p:txBody>
@@ -7617,7 +7578,7 @@
                 </a:solidFill>
                 <a:latin typeface="Noto Sans Thai"/>
               </a:rPr>
-              <a:t>Phase 2: สถานีตำรวจ</a:t>
+              <a:t>เฟส 2: ใช้ร่วมกันทั้งจังหวัด</a:t>
             </a:r>
           </a:p>
         </p:txBody>
@@ -7652,12 +7613,9 @@
                 </a:solidFill>
                 <a:latin typeface="Noto Sans Thai"/>
               </a:rPr>
-              <a:t>Server จังหวัด
-  ├── BSIE + Nginx (HTTPS)
-  ├── PostgreSQL Database
-  ├── Local LLM (Ollama+GPU)
-  └── File Storage
-PC สอบสวน 1-30 → Browser → HTTPS</a:t>
+              <a:t>ตั้งเซิร์ฟเวอร์กลางจังหวัด ปลอดภัยด้วยรหัสลับ
+ฐานข้อมูลใหญ่ + AI ภายในเครื่อง + การ์ดจอ
+พนักงานสอบสวน 1-30 คน → เปิดผ่านเบราว์เซอร์</a:t>
             </a:r>
           </a:p>
         </p:txBody>
@@ -7737,7 +7695,7 @@
                 </a:solidFill>
                 <a:latin typeface="Noto Sans Thai"/>
               </a:rPr>
-              <a:t>Phase 3-4: ระดับจังหวัด / ภาค / ประเทศ (On-Premise)</a:t>
+              <a:t>เฟส 3-4: ระดับจังหวัด / ภาค / ประเทศ (เซิร์ฟเวอร์ภายในหน่วยงาน)</a:t>
             </a:r>
           </a:p>
         </p:txBody>
@@ -7917,7 +7875,7 @@
                 </a:solidFill>
                 <a:latin typeface="Noto Sans Thai"/>
               </a:rPr>
-              <a:t>Roadmap การพัฒนา SPNI Platform</a:t>
+              <a:t>แผนพัฒนาระบบ SPNI</a:t>
             </a:r>
           </a:p>
         </p:txBody>
@@ -8350,7 +8308,7 @@
                 </a:solidFill>
                 <a:latin typeface="Noto Sans Thai"/>
               </a:rPr>
-              <a:t>Phase 1</a:t>
+              <a:t>เฟส 1</a:t>
             </a:r>
           </a:p>
         </p:txBody>
@@ -8385,7 +8343,7 @@
                 </a:solidFill>
                 <a:latin typeface="Noto Sans Thai"/>
               </a:rPr>
-              <a:t>Pilot</a:t>
+              <a:t>ทดลอง</a:t>
             </a:r>
           </a:p>
         </p:txBody>
@@ -8769,7 +8727,7 @@
                 </a:solidFill>
                 <a:latin typeface="Noto Sans Thai"/>
               </a:rPr>
-              <a:t>Phase 2</a:t>
+              <a:t>เฟส 2</a:t>
             </a:r>
           </a:p>
         </p:txBody>
@@ -9223,7 +9181,7 @@
                 </a:solidFill>
                 <a:latin typeface="Noto Sans Thai"/>
               </a:rPr>
-              <a:t>Phase 3</a:t>
+              <a:t>เฟส 3</a:t>
             </a:r>
           </a:p>
         </p:txBody>
@@ -9258,7 +9216,7 @@
                 </a:solidFill>
                 <a:latin typeface="Noto Sans Thai"/>
               </a:rPr>
-              <a:t>SPNI Foundation</a:t>
+              <a:t>ขยายระบบ</a:t>
             </a:r>
           </a:p>
         </p:txBody>
@@ -10203,7 +10161,7 @@
                 </a:solidFill>
                 <a:latin typeface="Noto Sans Thai"/>
               </a:rPr>
-              <a:t>Phase 1 เริ่มได้ทันที (ฟรี)  →  Phase 2 ของบหลัง pilot สำเร็จ  →  Phase 3-4 ขยายตามผลลัพธ์จริง</a:t>
+              <a:t>เฟส 1 เริ่มได้ทันที (ฟรี) → เฟส 2 ของบหลังทดลองสำเร็จ → เฟส 3-4 ขยายตามผลลัพธ์จริง</a:t>
             </a:r>
           </a:p>
         </p:txBody>
@@ -10299,7 +10257,7 @@
                 </a:solidFill>
                 <a:latin typeface="Noto Sans Thai"/>
               </a:rPr>
-              <a:t>งบประมาณระดับประเทศ — SPNI Platform</a:t>
+              <a:t>งบประมาณระดับประเทศ — ระบบ SPNI</a:t>
             </a:r>
           </a:p>
         </p:txBody>
@@ -10377,7 +10335,7 @@
                 </a:solidFill>
                 <a:latin typeface="Noto Sans Thai"/>
               </a:rPr>
-              <a:t>Phase 1: Pilot (3 เดือน)</a:t>
+              <a:t>เฟส 1: ทดลอง (3 เดือน)</a:t>
             </a:r>
           </a:p>
         </p:txBody>
@@ -10603,7 +10561,7 @@
                 </a:solidFill>
                 <a:latin typeface="Noto Sans Thai"/>
               </a:rPr>
-              <a:t>Phase 2: จังหวัดนำร่อง 5 จังหวัด (6 เดือน)</a:t>
+              <a:t>เฟส 2: นำร่อง 5 จังหวัด (6 เดือน)</a:t>
             </a:r>
           </a:p>
         </p:txBody>
@@ -10638,7 +10596,7 @@
                 </a:solidFill>
                 <a:latin typeface="Noto Sans Thai"/>
               </a:rPr>
-              <a:t>Application Server ×5 (CPU 8-core, 32GB, 1TB SSD)</a:t>
+              <a:t>เซิร์ฟเวอร์หลัก ×5 (CPU 8-core, 32GB, 1TB SSD)</a:t>
             </a:r>
           </a:p>
         </p:txBody>
@@ -10708,7 +10666,7 @@
                 </a:solidFill>
                 <a:latin typeface="Noto Sans Thai"/>
               </a:rPr>
-              <a:t>GPU Server สำหรับ Local LLM ×5 (RTX 4090/A6000)</a:t>
+              <a:t>เซิร์ฟเวอร์ AI + การ์ดจอ ×5 (RTX 4090/A6000)</a:t>
             </a:r>
           </a:p>
         </p:txBody>
@@ -10848,7 +10806,7 @@
                 </a:solidFill>
                 <a:latin typeface="Noto Sans Thai"/>
               </a:rPr>
-              <a:t>PostgreSQL Migration + พัฒนาเพิ่มเติม</a:t>
+              <a:t>อัปเกรดฐานข้อมูล + พัฒนาเพิ่ม</a:t>
             </a:r>
           </a:p>
         </p:txBody>
@@ -11109,7 +11067,7 @@
                 </a:solidFill>
                 <a:latin typeface="Noto Sans Thai"/>
               </a:rPr>
-              <a:t>Phase 3: SPNI Foundation + ขยาย 20 จังหวัด (12 เดือน)</a:t>
+              <a:t>เฟส 3: ขยาย 20 จังหวัด + โมดูล 2 (12 เดือน)</a:t>
             </a:r>
           </a:p>
         </p:txBody>
@@ -11144,7 +11102,7 @@
                 </a:solidFill>
                 <a:latin typeface="Noto Sans Thai"/>
               </a:rPr>
-              <a:t>CDR Analysis Module (โมดูล 2)</a:t>
+              <a:t>ระบบวิเคราะห์โทรศัพท์ (ส่วนงาน 2)</a:t>
             </a:r>
           </a:p>
         </p:txBody>
@@ -11284,7 +11242,7 @@
                 </a:solidFill>
                 <a:latin typeface="Noto Sans Thai"/>
               </a:rPr>
-              <a:t>Shared Intelligence Layer + Mobile App</a:t>
+              <a:t>ระบบข่าวกรองกลาง + แอปมือถือ</a:t>
             </a:r>
           </a:p>
         </p:txBody>
@@ -11545,7 +11503,7 @@
                 </a:solidFill>
                 <a:latin typeface="Noto Sans Thai"/>
               </a:rPr>
-              <a:t>Phase 4: ทั้งประเทศ 77 จังหวัด + 10 ภาค (ปีที่ 2-3)</a:t>
+              <a:t>เฟส 4: ทั้งประเทศ 77 จังหวัด + 10 ภาค (ปีที่ 2-3)</a:t>
             </a:r>
           </a:p>
         </p:txBody>
@@ -11580,7 +11538,7 @@
                 </a:solidFill>
                 <a:latin typeface="Noto Sans Thai"/>
               </a:rPr>
-              <a:t>Social Media + CCTV Module (โมดูล 3-4)</a:t>
+              <a:t>ระบบสื่อสังคม + กล้องวงจรปิด (ส่วนงาน 3-4)</a:t>
             </a:r>
           </a:p>
         </p:txBody>
@@ -11650,7 +11608,7 @@
                 </a:solidFill>
                 <a:latin typeface="Noto Sans Thai"/>
               </a:rPr>
-              <a:t>Data Center ระดับภาค ×10 + GPU Cluster</a:t>
+              <a:t>ศูนย์ข้อมูลระดับภาค ×10 + GPU Cluster</a:t>
             </a:r>
           </a:p>
         </p:txBody>
@@ -11720,7 +11678,7 @@
                 </a:solidFill>
                 <a:latin typeface="Noto Sans Thai"/>
               </a:rPr>
-              <a:t>Deploy 77 จังหวัด — server + network</a:t>
+              <a:t>ติดตั้ง 77 จังหวัด — server + network</a:t>
             </a:r>
           </a:p>
         </p:txBody>
@@ -11790,7 +11748,7 @@
                 </a:solidFill>
                 <a:latin typeface="Noto Sans Thai"/>
               </a:rPr>
-              <a:t>ทีมพัฒนา + DevOps 15 คน + อบรมทั่วประเทศ</a:t>
+              <a:t>ทีมพัฒนา 15 คน + อบรมทั่วประเทศ</a:t>
             </a:r>
           </a:p>
         </p:txBody>
@@ -12233,7 +12191,7 @@
                 </a:solidFill>
                 <a:latin typeface="Noto Sans Thai"/>
               </a:rPr>
-              <a:t>ไม่มีค่า license รายปี</a:t>
+              <a:t>ไม่มีค่าสิทธิ์ใช้งานรายปี</a:t>
             </a:r>
           </a:p>
         </p:txBody>
@@ -12547,7 +12505,7 @@
                 </a:solidFill>
                 <a:latin typeface="Noto Sans Thai"/>
               </a:rPr>
-              <a:t>Customizable เต็มที่</a:t>
+              <a:t>ปรับแต่งได้ตามต้องการ</a:t>
             </a:r>
           </a:p>
         </p:txBody>
@@ -12704,7 +12662,7 @@
                 </a:solidFill>
                 <a:latin typeface="Noto Sans Thai"/>
               </a:rPr>
-              <a:t>Data Sovereignty</a:t>
+              <a:t>อธิปไตยข้อมูล</a:t>
             </a:r>
           </a:p>
         </p:txBody>
@@ -12739,7 +12697,7 @@
                 </a:solidFill>
                 <a:latin typeface="Noto Sans Thai"/>
               </a:rPr>
-              <a:t>ข้อมูลทั้งหมดอยู่ใน On-Premise Server ของ สตช.
+              <a:t>ข้อมูลทั้งหมดอยู่ในเซิร์ฟเวอร์ภายในหน่วยงานของ สตช.
 ไม่มีข้อมูลคดีออกนอกประเทศ — Local LLM เท่านั้น</a:t>
             </a:r>
           </a:p>
@@ -12836,7 +12794,7 @@
                 </a:solidFill>
                 <a:latin typeface="Noto Sans Thai"/>
               </a:rPr>
-              <a:t>เปรียบเทียบกับซอฟต์แวร์ทางการค้า</a:t>
+              <a:t>เปรียบเทียบกับโปรแกรมที่ขายในตลาด</a:t>
             </a:r>
           </a:p>
         </p:txBody>
@@ -13538,7 +13496,7 @@
                 </a:solidFill>
                 <a:latin typeface="Noto Sans Thai"/>
               </a:rPr>
-              <a:t>1,484 สถานี/ปี</a:t>
+              <a:t>ค่าใช้จ่าย 1,484 สถานี/ปี</a:t>
             </a:r>
           </a:p>
         </p:txBody>
@@ -14240,7 +14198,7 @@
                 </a:solidFill>
                 <a:latin typeface="Noto Sans Thai"/>
               </a:rPr>
-              <a:t>✓ Auto-detect</a:t>
+              <a:t>✓ ตรวจจับอัตโนมัติ</a:t>
             </a:r>
           </a:p>
         </p:txBody>
@@ -16658,7 +16616,7 @@
                 </a:solidFill>
                 <a:latin typeface="Noto Sans Thai"/>
               </a:rPr>
-              <a:t>Customizable</a:t>
+              <a:t>ปรับแต่ง</a:t>
             </a:r>
           </a:p>
         </p:txBody>
@@ -16814,7 +16772,7 @@
                 </a:solidFill>
                 <a:latin typeface="Noto Sans Thai"/>
               </a:rPr>
-              <a:t>✗ Closed</a:t>
+              <a:t>✗ แก้ไขไม่ได้</a:t>
             </a:r>
           </a:p>
         </p:txBody>
@@ -16892,7 +16850,7 @@
                 </a:solidFill>
                 <a:latin typeface="Noto Sans Thai"/>
               </a:rPr>
-              <a:t>✗ Closed</a:t>
+              <a:t>✗ แก้ไขไม่ได้</a:t>
             </a:r>
           </a:p>
         </p:txBody>
@@ -16970,7 +16928,7 @@
                 </a:solidFill>
                 <a:latin typeface="Noto Sans Thai"/>
               </a:rPr>
-              <a:t>Data Sovereignty</a:t>
+              <a:t>อธิปไตยข้อมูล</a:t>
             </a:r>
           </a:p>
         </p:txBody>
@@ -17048,7 +17006,7 @@
                 </a:solidFill>
                 <a:latin typeface="Noto Sans Thai"/>
               </a:rPr>
-              <a:t>✓ On-Premise 100%</a:t>
+              <a:t>✓ ภายในหน่วย 100%</a:t>
             </a:r>
           </a:p>
         </p:txBody>
@@ -17300,7 +17258,7 @@
                 </a:solidFill>
                 <a:latin typeface="Noto Sans Thai"/>
               </a:rPr>
-              <a:t>ขนาดโปรเจค BSIE v4.0 — ตัวเลข</a:t>
+              <a:t>ขนาดระบบ BSIE v4.0 — ตัวเลข</a:t>
             </a:r>
           </a:p>
         </p:txBody>
@@ -17413,7 +17371,7 @@
                 </a:solidFill>
                 <a:latin typeface="Noto Sans Thai"/>
               </a:rPr>
-              <a:t>Python Files</a:t>
+              <a:t>ไฟล์โปรแกรมหลัก</a:t>
             </a:r>
           </a:p>
         </p:txBody>
@@ -17526,7 +17484,7 @@
                 </a:solidFill>
                 <a:latin typeface="Noto Sans Thai"/>
               </a:rPr>
-              <a:t>React/TS Files</a:t>
+              <a:t>ไฟล์หน้าจอแสดงผล</a:t>
             </a:r>
           </a:p>
         </p:txBody>
@@ -17639,7 +17597,7 @@
                 </a:solidFill>
                 <a:latin typeface="Noto Sans Thai"/>
               </a:rPr>
-              <a:t>Lines of Code</a:t>
+              <a:t>บรรทัดโค้ด</a:t>
             </a:r>
           </a:p>
         </p:txBody>
@@ -17752,7 +17710,7 @@
                 </a:solidFill>
                 <a:latin typeface="Noto Sans Thai"/>
               </a:rPr>
-              <a:t>API Endpoints</a:t>
+              <a:t>จุดเชื่อมต่อ</a:t>
             </a:r>
           </a:p>
         </p:txBody>
@@ -17865,7 +17823,7 @@
                 </a:solidFill>
                 <a:latin typeface="Noto Sans Thai"/>
               </a:rPr>
-              <a:t>API Routers</a:t>
+              <a:t>ชุดคำสั่ง</a:t>
             </a:r>
           </a:p>
         </p:txBody>
@@ -17978,7 +17936,7 @@
                 </a:solidFill>
                 <a:latin typeface="Noto Sans Thai"/>
               </a:rPr>
-              <a:t>Services</a:t>
+              <a:t>บริการย่อย</a:t>
             </a:r>
           </a:p>
         </p:txBody>
@@ -18091,7 +18049,7 @@
                 </a:solidFill>
                 <a:latin typeface="Noto Sans Thai"/>
               </a:rPr>
-              <a:t>Core Modules</a:t>
+              <a:t>ชุดประมวลผล</a:t>
             </a:r>
           </a:p>
         </p:txBody>
@@ -18204,7 +18162,7 @@
                 </a:solidFill>
                 <a:latin typeface="Noto Sans Thai"/>
               </a:rPr>
-              <a:t>DB Tables</a:t>
+              <a:t>ตารางข้อมูล</a:t>
             </a:r>
           </a:p>
         </p:txBody>
@@ -18317,7 +18275,7 @@
                 </a:solidFill>
                 <a:latin typeface="Noto Sans Thai"/>
               </a:rPr>
-              <a:t>Automated Tests</a:t>
+              <a:t>ชุดทดสอบอัตโนมัติ</a:t>
             </a:r>
           </a:p>
         </p:txBody>
@@ -18430,7 +18388,7 @@
                 </a:solidFill>
                 <a:latin typeface="Noto Sans Thai"/>
               </a:rPr>
-              <a:t>i18n Keys</a:t>
+              <a:t>จุดแปลภาษา</a:t>
             </a:r>
           </a:p>
         </p:txBody>
@@ -18656,7 +18614,7 @@
                 </a:solidFill>
                 <a:latin typeface="Noto Sans Thai"/>
               </a:rPr>
-              <a:t>Pipeline Steps</a:t>
+              <a:t>ขั้นตอนประมวลผล</a:t>
             </a:r>
           </a:p>
         </p:txBody>
@@ -18769,7 +18727,7 @@
                 </a:solidFill>
                 <a:latin typeface="Noto Sans Thai"/>
               </a:rPr>
-              <a:t>Alert Patterns</a:t>
+              <a:t>รูปแบบแจ้งเตือน</a:t>
             </a:r>
           </a:p>
         </p:txBody>
@@ -18882,7 +18840,7 @@
                 </a:solidFill>
                 <a:latin typeface="Noto Sans Thai"/>
               </a:rPr>
-              <a:t>FATF Models</a:t>
+              <a:t>แบบจำลองฟอกเงิน</a:t>
             </a:r>
           </a:p>
         </p:txBody>
@@ -18995,7 +18953,7 @@
                 </a:solidFill>
                 <a:latin typeface="Noto Sans Thai"/>
               </a:rPr>
-              <a:t>Anomaly Methods</a:t>
+              <a:t>วิธีตรวจจับผิดปกติ</a:t>
             </a:r>
           </a:p>
         </p:txBody>
@@ -19108,7 +19066,7 @@
                 </a:solidFill>
                 <a:latin typeface="Noto Sans Thai"/>
               </a:rPr>
-              <a:t>Investigation Tabs</a:t>
+              <a:t>เครื่องมือสืบสวน</a:t>
             </a:r>
           </a:p>
         </p:txBody>
@@ -19204,7 +19162,7 @@
                 </a:solidFill>
                 <a:latin typeface="Noto Sans Thai"/>
               </a:rPr>
-              <a:t>SPNI Platform — ภาพรวม 4 โมดูล</a:t>
+              <a:t>ระบบ SPNI — ภาพรวม 4 ส่วนงาน</a:t>
             </a:r>
           </a:p>
         </p:txBody>
@@ -19239,7 +19197,7 @@
                 </a:solidFill>
                 <a:latin typeface="Noto Sans Thai"/>
               </a:rPr>
-              <a:t>แพลตฟอร์มรวมเครื่องมือสืบสวนสอบสวนสำหรับ สตช. ทั้งประเทศ</a:t>
+              <a:t>ระบบรวมเครื่องมือช่วยงานสืบสวนสอบสวน สำหรับ สตช. ทั้งประเทศ</a:t>
             </a:r>
           </a:p>
         </p:txBody>
@@ -19354,7 +19312,7 @@
                 </a:solidFill>
                 <a:latin typeface="Noto Sans Thai"/>
               </a:rPr>
-              <a:t>BSIE — การเงิน</a:t>
+              <a:t>วิเคราะห์การเงิน</a:t>
             </a:r>
           </a:p>
         </p:txBody>
@@ -19539,7 +19497,7 @@
                 </a:solidFill>
                 <a:latin typeface="Noto Sans Thai"/>
               </a:rPr>
-              <a:t>CDR — โทรศัพท์</a:t>
+              <a:t>วิเคราะห์โทรศัพท์</a:t>
             </a:r>
           </a:p>
         </p:txBody>
@@ -19724,7 +19682,7 @@
                 </a:solidFill>
                 <a:latin typeface="Noto Sans Thai"/>
               </a:rPr>
-              <a:t>Social Media Intel</a:t>
+              <a:t>สื่อสังคมออนไลน์</a:t>
             </a:r>
           </a:p>
         </p:txBody>
@@ -19909,7 +19867,7 @@
                 </a:solidFill>
                 <a:latin typeface="Noto Sans Thai"/>
               </a:rPr>
-              <a:t>CCTV — ภาพ/วีดีโอ</a:t>
+              <a:t>กล้องวงจรปิด</a:t>
             </a:r>
           </a:p>
         </p:txBody>
@@ -20022,7 +19980,7 @@
                 </a:solidFill>
                 <a:latin typeface="Noto Sans Thai"/>
               </a:rPr>
-              <a:t>Shared Intelligence Layer</a:t>
+              <a:t>ชั้นแบ่งปันข่าวกรองกลาง</a:t>
             </a:r>
           </a:p>
         </p:txBody>
@@ -20100,7 +20058,7 @@
                 </a:solidFill>
                 <a:latin typeface="Noto Sans Thai"/>
               </a:rPr>
-              <a:t>Entity Registry</a:t>
+              <a:t>ทะเบียนบุคคล</a:t>
             </a:r>
           </a:p>
         </p:txBody>
@@ -20178,7 +20136,7 @@
                 </a:solidFill>
                 <a:latin typeface="Noto Sans Thai"/>
               </a:rPr>
-              <a:t>Link Analysis</a:t>
+              <a:t>วิเคราะห์ความเชื่อมโยง</a:t>
             </a:r>
           </a:p>
         </p:txBody>
@@ -20256,7 +20214,7 @@
                 </a:solidFill>
                 <a:latin typeface="Noto Sans Thai"/>
               </a:rPr>
-              <a:t>Case Mgmt</a:t>
+              <a:t>จัดการคดี</a:t>
             </a:r>
           </a:p>
         </p:txBody>
@@ -20334,7 +20292,7 @@
                 </a:solidFill>
                 <a:latin typeface="Noto Sans Thai"/>
               </a:rPr>
-              <a:t>Local LLM AI</a:t>
+              <a:t>AI ภายในเครื่อง</a:t>
             </a:r>
           </a:p>
         </p:txBody>
@@ -20412,7 +20370,7 @@
                 </a:solidFill>
                 <a:latin typeface="Noto Sans Thai"/>
               </a:rPr>
-              <a:t>Evidence Chain</a:t>
+              <a:t>สายโซ่หลักฐาน</a:t>
             </a:r>
           </a:p>
         </p:txBody>
@@ -20490,7 +20448,7 @@
                 </a:solidFill>
                 <a:latin typeface="Noto Sans Thai"/>
               </a:rPr>
-              <a:t>Regulatory</a:t>
+              <a:t>รายงาน กม.</a:t>
             </a:r>
           </a:p>
         </p:txBody>
@@ -20525,7 +20483,7 @@
                 </a:solidFill>
                 <a:latin typeface="Noto Sans Thai"/>
               </a:rPr>
-              <a:t>ทุกโมดูลเชื่อมข้อมูลข้ามกัน — บุคคลเดียวกันพบข้ามบัญชี + CDR + Social + CCTV</a:t>
+              <a:t>ทุกส่วนงานเชื่อมข้อมูลกัน — ค้นพบคนเดียวกันจากบัญชีธนาคาร + โทรศัพท์ + สื่อสังคม + กล้องวงจรปิด</a:t>
             </a:r>
           </a:p>
         </p:txBody>
@@ -20603,7 +20561,7 @@
                 </a:solidFill>
                 <a:latin typeface="Noto Sans Thai"/>
               </a:rPr>
-              <a:t>Infrastructure: On-Premise Server │ Local LLM (Ollama) │ PostgreSQL │ VPN/HTTPS │ ห้าม Cloud AI</a:t>
+              <a:t>โครงสร้างพื้นฐาน: เซิร์ฟเวอร์ภายในหน่วยงาน │ AI ในเครื่อง │ ฐานข้อมูล │ เครือข่ายปลอดภัย │ ห้ามใช้ AI ภายนอก</a:t>
             </a:r>
           </a:p>
         </p:txBody>
@@ -20638,7 +20596,7 @@
                 </a:solidFill>
                 <a:latin typeface="Noto Sans Thai"/>
               </a:rPr>
-              <a:t>ทำไมเริ่มจาก BSIE?
+              <a:t>ทำไมเริ่มจากระบบการเงิน?
 1) คดีการเงินมากที่สุด  2) ข้อมูลมีโครงสร้างชัดเจน  3) เห็นผลเร็ว — 3 วัน→30 นาที  4) พื้นฐานสำหรับโมดูลอื่น  5) ไม่มีเครื่องมือฟรีที่ดีในตลาด</a:t>
             </a:r>
           </a:p>
@@ -20891,7 +20849,7 @@
                 </a:solidFill>
                 <a:latin typeface="Noto Sans Thai"/>
               </a:rPr>
-              <a:t>จาก 3-5 วัน → 30 นาที ต่อคดี</a:t>
+              <a:t>จาก 3-5 วัน เหลือ 30 นาที ต่อคดี</a:t>
             </a:r>
           </a:p>
         </p:txBody>
@@ -21047,7 +21005,7 @@
                 </a:solidFill>
                 <a:latin typeface="Noto Sans Thai"/>
               </a:rPr>
-              <a:t>ประหยัด 742+ ล้านบาท/ปี (vs i2 1,484 สถานี)</a:t>
+              <a:t>ประหยัด 742+ ล้านบาท/ปี (เทียบค่า i2 สำหรับ 1,484 สถานี)</a:t>
             </a:r>
           </a:p>
         </p:txBody>
@@ -21203,7 +21161,7 @@
                 </a:solidFill>
                 <a:latin typeface="Noto Sans Thai"/>
               </a:rPr>
-              <a:t>ลดข้อผิดพลาดจากวิเคราะห์ด้วยมือ — ลดอุทธรณ์</a:t>
+              <a:t>ลดข้อผิดพลาดจากวิเคราะห์ด้วยมือ — ลดการอุทธรณ์คดี</a:t>
             </a:r>
           </a:p>
         </p:txBody>
@@ -21359,7 +21317,7 @@
                 </a:solidFill>
                 <a:latin typeface="Noto Sans Thai"/>
               </a:rPr>
-              <a:t>ป้องกันความเสียหายล่วงหน้า — ฟอกเงิน, ฉ้อโกง</a:t>
+              <a:t>ตรวจพบเร็ว ป้องกันความเสียหายล่วงหน้า</a:t>
             </a:r>
           </a:p>
         </p:txBody>
@@ -21593,7 +21551,7 @@
                 </a:solidFill>
                 <a:latin typeface="Noto Sans Thai"/>
               </a:rPr>
-              <a:t>คืนทุนใน 1 ปี — ค่า license i2 ปีเดียว &gt; งบ SPNI ทั้ง 3 ปี</a:t>
+              <a:t>คืนทุนใน 1 ปี — ค่าสิทธิ์ i2 ปีเดียว มากกว่างบ SPNI ทั้ง 3 ปี</a:t>
             </a:r>
           </a:p>
         </p:txBody>
@@ -21769,7 +21727,7 @@
                 </a:solidFill>
                 <a:latin typeface="Noto Sans Thai"/>
               </a:rPr>
-              <a:t>Phase 1-2: ทำได้คนเดียว + AI</a:t>
+              <a:t>เฟส 1-2: ทำได้คนเดียว + AI ช่วย</a:t>
             </a:r>
           </a:p>
         </p:txBody>
@@ -21983,7 +21941,7 @@
                 </a:solidFill>
                 <a:latin typeface="Noto Sans Thai"/>
               </a:rPr>
-              <a:t>Phase 3-4: ต้องการทีม 8-12 คน</a:t>
+              <a:t>เฟส 3-4: ต้องการทีม 8-12 คน</a:t>
             </a:r>
           </a:p>
         </p:txBody>
@@ -22034,7 +21992,7 @@
                 </a:solidFill>
                 <a:latin typeface="Noto Sans Thai"/>
               </a:rPr>
-              <a:t>Backend Dev </a:t>
+              <a:t>โปรแกรมเมอร์ฝั่งเซิร์ฟเวอร์ </a:t>
             </a:r>
             <a:r>
               <a:rPr sz="1200" b="1">
@@ -22052,7 +22010,7 @@
                 </a:solidFill>
                 <a:latin typeface="Noto Sans Thai"/>
               </a:rPr>
-              <a:t> │ Frontend Dev </a:t>
+              <a:t> │ ฝั่งหน้าจอ </a:t>
             </a:r>
             <a:r>
               <a:rPr sz="1200" b="1">
@@ -22089,7 +22047,7 @@
                 </a:solidFill>
                 <a:latin typeface="Noto Sans Thai"/>
               </a:rPr>
-              <a:t>DevOps </a:t>
+              <a:t>ดูแลระบบ </a:t>
             </a:r>
             <a:r>
               <a:rPr sz="1200" b="1">
@@ -22107,7 +22065,7 @@
                 </a:solidFill>
                 <a:latin typeface="Noto Sans Thai"/>
               </a:rPr>
-              <a:t> │ AI/ML Engineer </a:t>
+              <a:t> │ วิศวกร AI </a:t>
             </a:r>
             <a:r>
               <a:rPr sz="1200" b="1">
@@ -22144,7 +22102,7 @@
                 </a:solidFill>
                 <a:latin typeface="Noto Sans Thai"/>
               </a:rPr>
-              <a:t>QA </a:t>
+              <a:t>ทดสอบ </a:t>
             </a:r>
             <a:r>
               <a:rPr sz="1200" b="1">
@@ -22162,7 +22120,7 @@
                 </a:solidFill>
                 <a:latin typeface="Noto Sans Thai"/>
               </a:rPr>
-              <a:t> │ Project Manager </a:t>
+              <a:t> │ ผู้จัดการโครงการ </a:t>
             </a:r>
             <a:r>
               <a:rPr sz="1200" b="1">
@@ -24090,7 +24048,7 @@
                 </a:solidFill>
                 <a:latin typeface="Noto Sans Thai"/>
               </a:rPr>
-              <a:t>ทดลอง Pilot กับคดีจริง 5-10 คดี (ฟรี)</a:t>
+              <a:t>ทดลองใช้กับคดีจริง 5-10 คดี (ฟรี)</a:t>
             </a:r>
           </a:p>
         </p:txBody>
@@ -24160,7 +24118,7 @@
                 </a:solidFill>
                 <a:latin typeface="Noto Sans Thai"/>
               </a:rPr>
-              <a:t>เก็บ feedback จากพนักงานสอบสวน</a:t>
+              <a:t>เก็บความเห็นจากพนักงานสอบสวน</a:t>
             </a:r>
           </a:p>
         </p:txBody>
@@ -24230,7 +24188,7 @@
                 </a:solidFill>
                 <a:latin typeface="Noto Sans Thai"/>
               </a:rPr>
-              <a:t>เสนองบ Phase 2: ~8 ล้านบาท (5 จังหวัดนำร่อง)</a:t>
+              <a:t>เสนองบเฟส 2: ~8 ล้านบาท (5 จังหวัดนำร่อง)</a:t>
             </a:r>
           </a:p>
         </p:txBody>
@@ -24300,7 +24258,7 @@
                 </a:solidFill>
                 <a:latin typeface="Noto Sans Thai"/>
               </a:rPr>
-              <a:t>ขยายสู่ SPNI Platform ทั้งประเทศ — 77 จังหวัด 1,484 สถานี</a:t>
+              <a:t>ขยายสู่ระบบ SPNI ทั้งประเทศ — 77 จังหวัด 1,484 สถานี</a:t>
             </a:r>
           </a:p>
         </p:txBody>
@@ -24378,7 +24336,7 @@
                 </a:solidFill>
                 <a:latin typeface="Noto Sans Thai"/>
               </a:rPr>
-              <a:t>งบ SPNI ทั้ง 3 ปี (~170 ล้าน)  &lt;  ค่า license i2 ปีเดียว (742+ ล้าน)  →  คืนทุนทันที</a:t>
+              <a:t>งบ SPNI ทั้ง 3 ปี (~170 ล้าน) น้อยกว่า ค่าสิทธิ์ i2 ปีเดียว (742+ ล้าน) คืนทุนทันที</a:t>
             </a:r>
           </a:p>
         </p:txBody>
@@ -24640,7 +24598,7 @@
                 </a:solidFill>
                 <a:latin typeface="Noto Sans Thai"/>
               </a:rPr>
-              <a:t>วิเคราะห์ Statement </a:t>
+              <a:t>วิเคราะห์รายการเดินบัญชี</a:t>
             </a:r>
             <a:r>
               <a:rPr sz="1300" b="1">
@@ -24796,7 +24754,7 @@
                 </a:solidFill>
                 <a:latin typeface="Noto Sans Thai"/>
               </a:rPr>
-              <a:t>i2 Analyst's Notebook ราคา </a:t>
+              <a:t>โปรแกรม i2 ราคา </a:t>
             </a:r>
             <a:r>
               <a:rPr sz="1300" b="1">
@@ -24805,7 +24763,7 @@
                 </a:solidFill>
                 <a:latin typeface="Noto Sans Thai"/>
               </a:rPr>
-              <a:t>500,000+ บาท/license/ปี</a:t>
+              <a:t>500,000+ บาท/สิทธิ์/ปี</a:t>
             </a:r>
             <a:r>
               <a:rPr sz="1300" b="0">
@@ -24814,7 +24772,7 @@
                 </a:solidFill>
                 <a:latin typeface="Noto Sans Thai"/>
               </a:rPr>
-              <a:t> ไม่รองรับไทย</a:t>
+              <a:t> ไม่รองรับภาษาไทย</a:t>
             </a:r>
           </a:p>
           <a:p>
@@ -24851,16 +24809,7 @@
                 </a:solidFill>
                 <a:latin typeface="Noto Sans Thai"/>
               </a:rPr>
-              <a:t>รายงาน ปปง.</a:t>
-            </a:r>
-            <a:r>
-              <a:rPr sz="1300" b="0">
-                <a:solidFill>
-                  <a:srgbClr val="1A202C"/>
-                </a:solidFill>
-                <a:latin typeface="Noto Sans Thai"/>
-              </a:rPr>
-              <a:t> (STR/CTR)</a:t>
+              <a:t>รายงานส่ง ปปง.</a:t>
             </a:r>
           </a:p>
           <a:p>
@@ -25203,7 +25152,7 @@
                 </a:solidFill>
                 <a:latin typeface="Noto Sans Thai"/>
               </a:rPr>
-              <a:t>กราฟเครือข่าย Timeline </a:t>
+              <a:t>แผนภาพเครือข่าย แสดงลำดับเวลา </a:t>
             </a:r>
             <a:r>
               <a:rPr sz="1300" b="1">
@@ -25240,7 +25189,7 @@
                 </a:solidFill>
                 <a:latin typeface="Noto Sans Thai"/>
               </a:rPr>
-              <a:t>มี </a:t>
+              <a:t>มี</a:t>
             </a:r>
             <a:r>
               <a:rPr sz="1300" b="1">
@@ -25249,7 +25198,7 @@
                 </a:solidFill>
                 <a:latin typeface="Noto Sans Thai"/>
               </a:rPr>
-              <a:t>mini i2 Analyst's Notebook</a:t>
+              <a:t>แผนภาพเครือข่ายแบบ i2</a:t>
             </a:r>
             <a:r>
               <a:rPr sz="1300" b="0">
@@ -25295,7 +25244,7 @@
                 </a:solidFill>
                 <a:latin typeface="Noto Sans Thai"/>
               </a:rPr>
-              <a:t>สร้างรายงาน </a:t>
+              <a:t>สร้าง</a:t>
             </a:r>
             <a:r>
               <a:rPr sz="1300" b="1">
@@ -25304,7 +25253,7 @@
                 </a:solidFill>
                 <a:latin typeface="Noto Sans Thai"/>
               </a:rPr>
-              <a:t>PDF/Excel/STR/CTR</a:t>
+              <a:t>รายงานพร้อมส่ง ปปง.</a:t>
             </a:r>
             <a:r>
               <a:rPr sz="1300" b="0">
@@ -25350,7 +25299,7 @@
                 </a:solidFill>
                 <a:latin typeface="Noto Sans Thai"/>
               </a:rPr>
-              <a:t> FATF อัตโนมัติ</a:t>
+              <a:t>ตามมาตรฐานสากลอัตโนมัติ</a:t>
             </a:r>
           </a:p>
           <a:p>
@@ -25387,7 +25336,7 @@
                 </a:solidFill>
                 <a:latin typeface="Noto Sans Thai"/>
               </a:rPr>
-              <a:t>Z-score, IQR, Benford's Law</a:t>
+              <a:t>ค่าเบี่ยงเบน, ค่าผิดปกติ, กฎตัวเลขหลักแรก</a:t>
             </a:r>
           </a:p>
           <a:p>
@@ -25424,7 +25373,7 @@
                 </a:solidFill>
                 <a:latin typeface="Noto Sans Thai"/>
               </a:rPr>
-              <a:t>ไม่มีค่า license</a:t>
+              <a:t>ไม่มีค่าสิทธิ์รายปี</a:t>
             </a:r>
             <a:r>
               <a:rPr sz="1300" b="0">
@@ -25538,7 +25487,7 @@
                 </a:solidFill>
                 <a:latin typeface="Noto Sans Thai"/>
               </a:rPr>
-              <a:t>สถาปัตยกรรมระบบ BSIE v4.0</a:t>
+              <a:t>โครงสร้างระบบ BSIE v4.0</a:t>
             </a:r>
           </a:p>
         </p:txBody>
@@ -25616,7 +25565,7 @@
                 </a:solidFill>
                 <a:latin typeface="Noto Sans Thai"/>
               </a:rPr>
-              <a:t>Frontend</a:t>
+              <a:t>ส่วนแสดงผล (หน้าจอ)</a:t>
             </a:r>
           </a:p>
         </p:txBody>
@@ -26318,7 +26267,7 @@
                 </a:solidFill>
                 <a:latin typeface="Noto Sans Thai"/>
               </a:rPr>
-              <a:t>Backend</a:t>
+              <a:t>ส่วนประมวลผล (เซิร์ฟเวอร์)</a:t>
             </a:r>
           </a:p>
         </p:txBody>
@@ -26353,7 +26302,7 @@
                 </a:solidFill>
                 <a:latin typeface="Noto Sans Thai"/>
               </a:rPr>
-              <a:t>Python 3.12 │ FastAPI │ 21 Routers │ 34 Services │ 120+ Endpoints</a:t>
+              <a:t>Python 3.12 │ FastAPI │ 21 ชุดคำสั่ง │ 34 บริการ │ 120+ จุดเชื่อมต่อ</a:t>
             </a:r>
           </a:p>
         </p:txBody>
@@ -27211,7 +27160,7 @@
                 </a:solidFill>
                 <a:latin typeface="Noto Sans Thai"/>
               </a:rPr>
-              <a:t>Processing Core — 30 modules</a:t>
+              <a:t>แกนหลักประมวลผล — 30 ชุดโปรแกรม</a:t>
             </a:r>
           </a:p>
         </p:txBody>
@@ -27246,9 +27195,9 @@
                 </a:solidFill>
                 <a:latin typeface="Noto Sans Thai"/>
               </a:rPr>
-              <a:t>bank_detector, column_detector, nlp_engine, normalizer,
-classifier, link_builder, graph_rules, pdf_loader,
-image_loader (OCR), exporter, llm_agent ...</a:t>
+              <a:t>ตรวจจับธนาคาร, จับคู่คอลัมน์, วิเคราะห์ภาษา,
+จัดรูปแบบข้อมูล, จำแนกประเภท, สร้างความเชื่อมโยง,
+อ่าน PDF/รูปภาพ, ส่งออกรายงาน, AI ช่วยวิเคราะห์ ...</a:t>
             </a:r>
           </a:p>
         </p:txBody>
@@ -27326,7 +27275,7 @@
                 </a:solidFill>
                 <a:latin typeface="Noto Sans Thai"/>
               </a:rPr>
-              <a:t>34 Services</a:t>
+              <a:t>34 บริการย่อย</a:t>
             </a:r>
           </a:p>
         </p:txBody>
@@ -27361,9 +27310,9 @@
                 </a:solidFill>
                 <a:latin typeface="Noto Sans Thai"/>
               </a:rPr>
-              <a:t>alert, anomaly_detection, sna, threat_hunting,
-fund_flow, auth, regulatory_export, report,
-insights, case_tapestry, job_queue, audit ...</a:t>
+              <a:t>แจ้งเตือน, ตรวจจับผิดปกติ, วิเคราะห์เครือข่าย,
+ล่าภัยคุกคาม, ติดตามเส้นทางเงิน, ยืนยันตัวตน,
+รายงาน ปปง., สรุปผล, คิวงาน, ตรวจสอบย้อนหลัง ...</a:t>
             </a:r>
           </a:p>
         </p:txBody>
@@ -27441,7 +27390,7 @@
                 </a:solidFill>
                 <a:latin typeface="Noto Sans Thai"/>
               </a:rPr>
-              <a:t>Database: SQLAlchemy 2 + SQLite WAL</a:t>
+              <a:t>ฐานข้อมูล: 20 ตาราง พร้อมอัปเกรด</a:t>
             </a:r>
           </a:p>
         </p:txBody>
@@ -27476,7 +27425,7 @@
                 </a:solidFill>
                 <a:latin typeface="Noto Sans Thai"/>
               </a:rPr>
-              <a:t>20 tables │ Alembic migrations │ Optimized pragmas │ → PostgreSQL (Phase 2)</a:t>
+              <a:t>20 ตาราง │ ระบบอัปเกรดอัตโนมัติ │ ปรับแต่งความเร็ว │ อัปเกรดเป็นฐานข้อมูลใหญ่ (เฟส 2)</a:t>
             </a:r>
           </a:p>
         </p:txBody>
@@ -27554,7 +27503,7 @@
                 </a:solidFill>
                 <a:latin typeface="Noto Sans Thai"/>
               </a:rPr>
-              <a:t>AI/ML: Local LLM + NLP</a:t>
+              <a:t>ปัญญาประดิษฐ์: AI ภายในเครื่อง</a:t>
             </a:r>
           </a:p>
         </p:txBody>
@@ -27589,7 +27538,7 @@
                 </a:solidFill>
                 <a:latin typeface="Noto Sans Thai"/>
               </a:rPr>
-              <a:t>EasyOCR (Thai+EN) │ NLP Engine (ชื่อ/เบอร์/บัตร ปชช./PromptPay) │ Ollama</a:t>
+              <a:t>อ่านภาพ/สแกน (ไทย+อังกฤษ) │ ดึงชื่อ/เบอร์/บัตร ปชช./พร้อมเพย์อัตโนมัติ</a:t>
             </a:r>
           </a:p>
         </p:txBody>
@@ -27685,7 +27634,7 @@
                 </a:solidFill>
                 <a:latin typeface="Noto Sans Thai"/>
               </a:rPr>
-              <a:t>ฐานข้อมูล — 20 Tables</a:t>
+              <a:t>ฐานข้อมูล — 20 ตาราง</a:t>
             </a:r>
           </a:p>
         </p:txBody>
@@ -27800,7 +27749,7 @@
                 </a:solidFill>
                 <a:latin typeface="Noto Sans Thai"/>
               </a:rPr>
-              <a:t>ไฟล์อัพโหลด + SHA-256</a:t>
+              <a:t>ไฟล์ที่อัพโหลด + ตรวจสอบความถูกต้อง</a:t>
             </a:r>
           </a:p>
         </p:txBody>
@@ -28030,7 +27979,7 @@
                 </a:solidFill>
                 <a:latin typeface="Noto Sans Thai"/>
               </a:rPr>
-              <a:t>บัญชีทุกแห่ง (normalized)</a:t>
+              <a:t>บัญชีทุกแห่ง (จัดรูปแบบแล้ว)</a:t>
             </a:r>
           </a:p>
         </p:txBody>
@@ -28145,7 +28094,7 @@
                 </a:solidFill>
                 <a:latin typeface="Noto Sans Thai"/>
               </a:rPr>
-              <a:t>ธุรกรรม 30+ fields</a:t>
+              <a:t>ธุรกรรม 30+ ข้อมูล</a:t>
             </a:r>
           </a:p>
         </p:txBody>
@@ -28375,7 +28324,7 @@
                 </a:solidFill>
                 <a:latin typeface="Noto Sans Thai"/>
               </a:rPr>
-              <a:t>ข้อมูลดิบ forensic</a:t>
+              <a:t>ข้อมูลดิบสำหรับนิติวิทยาศาสตร์</a:t>
             </a:r>
           </a:p>
         </p:txBody>
@@ -28605,7 +28554,7 @@
                 </a:solidFill>
                 <a:latin typeface="Noto Sans Thai"/>
               </a:rPr>
-              <a:t>เชื่อม Account↔Entity</a:t>
+              <a:t>เชื่อมบัญชี↔บุคคล</a:t>
             </a:r>
           </a:p>
         </p:txBody>
@@ -28835,7 +28784,7 @@
                 </a:solidFill>
                 <a:latin typeface="Noto Sans Thai"/>
               </a:rPr>
-              <a:t>แจ้งเตือน + severity</a:t>
+              <a:t>แจ้งเตือน + ระดับความรุนแรง</a:t>
             </a:r>
           </a:p>
         </p:txBody>
@@ -29065,7 +29014,7 @@
                 </a:solidFill>
                 <a:latin typeface="Noto Sans Thai"/>
               </a:rPr>
-              <a:t>การตัดสินใจ analyst</a:t>
+              <a:t>การตัดสินใจของนักวิเคราะห์</a:t>
             </a:r>
           </a:p>
         </p:txBody>
@@ -29180,7 +29129,7 @@
                 </a:solidFill>
                 <a:latin typeface="Noto Sans Thai"/>
               </a:rPr>
-              <a:t>Audit Trail ทุก action</a:t>
+              <a:t>ร่องรอยตรวจสอบทุกการกระทำ</a:t>
             </a:r>
           </a:p>
         </p:txBody>
@@ -29410,7 +29359,7 @@
                 </a:solidFill>
                 <a:latin typeface="Noto Sans Thai"/>
               </a:rPr>
-              <a:t>ผู้ใช้ JWT + RBAC</a:t>
+              <a:t>ผู้ใช้งาน + ระดับสิทธิ์</a:t>
             </a:r>
           </a:p>
         </p:txBody>
@@ -29525,7 +29474,7 @@
                 </a:solidFill>
                 <a:latin typeface="Noto Sans Thai"/>
               </a:rPr>
-              <a:t>ตั้งค่า + Workspace</a:t>
+              <a:t>ตั้งค่า + พื้นที่ทำงาน</a:t>
             </a:r>
           </a:p>
         </p:txBody>
@@ -29640,7 +29589,7 @@
                 </a:solidFill>
                 <a:latin typeface="Noto Sans Thai"/>
               </a:rPr>
-              <a:t>บันทึกบน node</a:t>
+              <a:t>บันทึกบนจุดกราฟ</a:t>
             </a:r>
           </a:p>
         </p:txBody>
@@ -29870,7 +29819,7 @@
                 </a:solidFill>
                 <a:latin typeface="Noto Sans Thai"/>
               </a:rPr>
-              <a:t>เชื่อม tag↔วัตถุ</a:t>
+              <a:t>เชื่อมแท็ก↔ข้อมูล</a:t>
             </a:r>
           </a:p>
         </p:txBody>
@@ -29985,7 +29934,7 @@
                 </a:solidFill>
                 <a:latin typeface="Noto Sans Thai"/>
               </a:rPr>
-              <a:t>โปรไฟล์ mapping</a:t>
+              <a:t>แบบแผนจับคู่คอลัมน์</a:t>
             </a:r>
           </a:p>
         </p:txBody>
@@ -30020,7 +29969,7 @@
                 </a:solidFill>
                 <a:latin typeface="Noto Sans Thai"/>
               </a:rPr>
-              <a:t>25+ Indexes │ Unique constraints │ Foreign keys │ JSON columns │ Alembic migrations</a:t>
+              <a:t>25+ ดัชนีค้นหาเร็ว │ ป้องกันข้อมูลซ้ำ │ เชื่อมโยงตาราง │ ข้อมูลยืดหยุ่น │ อัปเกรดอัตโนมัติ</a:t>
             </a:r>
           </a:p>
         </p:txBody>
@@ -30116,7 +30065,7 @@
                 </a:solidFill>
                 <a:latin typeface="Noto Sans Thai"/>
               </a:rPr>
-              <a:t>Processing Pipeline — 14 ขั้นตอน</a:t>
+              <a:t>ขั้นตอนการประมวลผล — 14 ขั้นตอน</a:t>
             </a:r>
           </a:p>
         </p:txBody>
@@ -30231,7 +30180,7 @@
                 </a:solidFill>
                 <a:latin typeface="Noto Sans Thai"/>
               </a:rPr>
-              <a:t>Load File</a:t>
+              <a:t>โหลดไฟล์</a:t>
             </a:r>
           </a:p>
         </p:txBody>
@@ -30266,7 +30215,7 @@
                 </a:solidFill>
                 <a:latin typeface="Noto Sans Thai"/>
               </a:rPr>
-              <a:t>Excel/PDF/Image/OFX</a:t>
+              <a:t>ทุกรูปแบบไฟล์</a:t>
             </a:r>
           </a:p>
         </p:txBody>
@@ -30381,7 +30330,7 @@
                 </a:solidFill>
                 <a:latin typeface="Noto Sans Thai"/>
               </a:rPr>
-              <a:t>Detect Bank</a:t>
+              <a:t>ตรวจจับธนาคาร</a:t>
             </a:r>
           </a:p>
         </p:txBody>
@@ -30416,7 +30365,7 @@
                 </a:solidFill>
                 <a:latin typeface="Noto Sans Thai"/>
               </a:rPr>
-              <a:t>8 ธนาคาร auto</a:t>
+              <a:t>8 ธนาคารอัตโนมัติ</a:t>
             </a:r>
           </a:p>
         </p:txBody>
@@ -30531,7 +30480,7 @@
                 </a:solidFill>
                 <a:latin typeface="Noto Sans Thai"/>
               </a:rPr>
-              <a:t>Detect Cols</a:t>
+              <a:t>จับคู่คอลัมน์</a:t>
             </a:r>
           </a:p>
         </p:txBody>
@@ -30566,7 +30515,7 @@
                 </a:solidFill>
                 <a:latin typeface="Noto Sans Thai"/>
               </a:rPr>
-              <a:t>Fuzzy 3-tier</a:t>
+              <a:t>จับคู่อัจฉริยะ 3 ชั้น</a:t>
             </a:r>
           </a:p>
         </p:txBody>
@@ -30681,7 +30630,7 @@
                 </a:solidFill>
                 <a:latin typeface="Noto Sans Thai"/>
               </a:rPr>
-              <a:t>Load Memory</a:t>
+              <a:t>โหลดแบบแผน</a:t>
             </a:r>
           </a:p>
         </p:txBody>
@@ -30716,7 +30665,7 @@
                 </a:solidFill>
                 <a:latin typeface="Noto Sans Thai"/>
               </a:rPr>
-              <a:t>Profile ที่จำไว้</a:t>
+              <a:t>จำรูปแบบที่เคยใช้</a:t>
             </a:r>
           </a:p>
         </p:txBody>
@@ -30831,7 +30780,7 @@
                 </a:solidFill>
                 <a:latin typeface="Noto Sans Thai"/>
               </a:rPr>
-              <a:t>Apply Map</a:t>
+              <a:t>จัดรูปข้อมูล</a:t>
             </a:r>
           </a:p>
         </p:txBody>
@@ -30866,7 +30815,7 @@
                 </a:solidFill>
                 <a:latin typeface="Noto Sans Thai"/>
               </a:rPr>
-              <a:t>แปลงคอลัมน์</a:t>
+              <a:t>แปลงให้ตรงรูปแบบ</a:t>
             </a:r>
           </a:p>
         </p:txBody>
@@ -30981,7 +30930,7 @@
                 </a:solidFill>
                 <a:latin typeface="Noto Sans Thai"/>
               </a:rPr>
-              <a:t>Normalize</a:t>
+              <a:t>ปรับมาตรฐาน</a:t>
             </a:r>
           </a:p>
         </p:txBody>
@@ -31016,7 +30965,7 @@
                 </a:solidFill>
                 <a:latin typeface="Noto Sans Thai"/>
               </a:rPr>
-              <a:t>วันที่/เงิน/ทิศทาง</a:t>
+              <a:t>วันที่/จำนวนเงิน/เข้า-ออก</a:t>
             </a:r>
           </a:p>
         </p:txBody>
@@ -31131,7 +31080,7 @@
                 </a:solidFill>
                 <a:latin typeface="Noto Sans Thai"/>
               </a:rPr>
-              <a:t>Parse Acct</a:t>
+              <a:t>แยกเลขบัญชี</a:t>
             </a:r>
           </a:p>
         </p:txBody>
@@ -31166,7 +31115,7 @@
                 </a:solidFill>
                 <a:latin typeface="Noto Sans Thai"/>
               </a:rPr>
-              <a:t>แยกเลข normalize</a:t>
+              <a:t>แยกและจัดรูปแบบ</a:t>
             </a:r>
           </a:p>
         </p:txBody>
@@ -31281,7 +31230,7 @@
                 </a:solidFill>
                 <a:latin typeface="Noto Sans Thai"/>
               </a:rPr>
-              <a:t>Extract Desc</a:t>
+              <a:t>แยกรายละเอียด</a:t>
             </a:r>
           </a:p>
         </p:txBody>
@@ -31431,7 +31380,7 @@
                 </a:solidFill>
                 <a:latin typeface="Noto Sans Thai"/>
               </a:rPr>
-              <a:t>NLP Enrich</a:t>
+              <a:t>ดึงชื่อ/เบอร์/ID</a:t>
             </a:r>
           </a:p>
         </p:txBody>
@@ -31466,7 +31415,7 @@
                 </a:solidFill>
                 <a:latin typeface="Noto Sans Thai"/>
               </a:rPr>
-              <a:t>ชื่อ/เบอร์/ID/PP</a:t>
+              <a:t>ชื่อไทย/เบอร์/บัตร ปชช.</a:t>
             </a:r>
           </a:p>
         </p:txBody>
@@ -31581,7 +31530,7 @@
                 </a:solidFill>
                 <a:latin typeface="Noto Sans Thai"/>
               </a:rPr>
-              <a:t>Classify</a:t>
+              <a:t>จำแนกประเภท</a:t>
             </a:r>
           </a:p>
         </p:txBody>
@@ -31616,7 +31565,7 @@
                 </a:solidFill>
                 <a:latin typeface="Noto Sans Thai"/>
               </a:rPr>
-              <a:t>IN/OUT/TRANSFER</a:t>
+              <a:t>เงินเข้า/เงินออก/โอน</a:t>
             </a:r>
           </a:p>
         </p:txBody>
@@ -31731,7 +31680,7 @@
                 </a:solidFill>
                 <a:latin typeface="Noto Sans Thai"/>
               </a:rPr>
-              <a:t>Build Links</a:t>
+              <a:t>สร้างเชื่อมโยง</a:t>
             </a:r>
           </a:p>
         </p:txBody>
@@ -31766,7 +31715,7 @@
                 </a:solidFill>
                 <a:latin typeface="Noto Sans Thai"/>
               </a:rPr>
-              <a:t>from→to accounts</a:t>
+              <a:t>จากบัญชี→ไปบัญชี</a:t>
             </a:r>
           </a:p>
         </p:txBody>
@@ -31881,7 +31830,7 @@
                 </a:solidFill>
                 <a:latin typeface="Noto Sans Thai"/>
               </a:rPr>
-              <a:t>Overrides</a:t>
+              <a:t>แก้ไขด้วยมือ</a:t>
             </a:r>
           </a:p>
         </p:txBody>
@@ -31916,7 +31865,7 @@
                 </a:solidFill>
                 <a:latin typeface="Noto Sans Thai"/>
               </a:rPr>
-              <a:t>แก้ไขจาก analyst</a:t>
+              <a:t>แก้ไขจากผู้วิเคราะห์</a:t>
             </a:r>
           </a:p>
         </p:txBody>
@@ -32031,7 +31980,7 @@
                 </a:solidFill>
                 <a:latin typeface="Noto Sans Thai"/>
               </a:rPr>
-              <a:t>Build Entity</a:t>
+              <a:t>สร้างทะเบียนบุคคล</a:t>
             </a:r>
           </a:p>
         </p:txBody>
@@ -32181,7 +32130,7 @@
                 </a:solidFill>
                 <a:latin typeface="Noto Sans Thai"/>
               </a:rPr>
-              <a:t>Export</a:t>
+              <a:t>ส่งออกรายงาน</a:t>
             </a:r>
           </a:p>
         </p:txBody>
@@ -32216,7 +32165,7 @@
                 </a:solidFill>
                 <a:latin typeface="Noto Sans Thai"/>
               </a:rPr>
-              <a:t>Account Package</a:t>
+              <a:t>ชุดข้อมูลบัญชี</a:t>
             </a:r>
           </a:p>
         </p:txBody>
@@ -32312,7 +32261,7 @@
                 </a:solidFill>
                 <a:latin typeface="Noto Sans Thai"/>
               </a:rPr>
-              <a:t>การนำเข้าข้อมูล — ครบทุกรูปแบบ</a:t>
+              <a:t>การนำเข้าข้อมูล — รองรับทุกรูปแบบ</a:t>
             </a:r>
           </a:p>
         </p:txBody>
@@ -33110,7 +33059,7 @@
                 </a:solidFill>
                 <a:latin typeface="Noto Sans Thai"/>
               </a:rPr>
-              <a:t>Smart Column Mapping</a:t>
+              <a:t>จับคู่คอลัมน์อัจฉริยะ</a:t>
             </a:r>
           </a:p>
         </p:txBody>
@@ -33161,7 +33110,7 @@
                 </a:solidFill>
                 <a:latin typeface="Noto Sans Thai"/>
               </a:rPr>
-              <a:t>3-tier Fuzzy</a:t>
+              <a:t>จับคู่อัจฉริยะ 3 ชั้น</a:t>
             </a:r>
             <a:r>
               <a:rPr sz="1200" b="0">
@@ -33170,7 +33119,7 @@
                 </a:solidFill>
                 <a:latin typeface="Noto Sans Thai"/>
               </a:rPr>
-              <a:t> — exact → alias → fuzzy</a:t>
+              <a:t> — ตรง → ชื่อคล้าย → คล้ายคลึง</a:t>
             </a:r>
           </a:p>
           <a:p>
@@ -33198,7 +33147,7 @@
                 </a:solidFill>
                 <a:latin typeface="Noto Sans Thai"/>
               </a:rPr>
-              <a:t>Self-learning</a:t>
+              <a:t>เรียนรู้เอง</a:t>
             </a:r>
             <a:r>
               <a:rPr sz="1200" b="0">
@@ -33207,7 +33156,7 @@
                 </a:solidFill>
                 <a:latin typeface="Noto Sans Thai"/>
               </a:rPr>
-              <a:t> — จำ profile ที่เคย mapping</a:t>
+              <a:t> — จำรูปแบบที่เคยใช้</a:t>
             </a:r>
           </a:p>
           <a:p>
@@ -33235,7 +33184,7 @@
                 </a:solidFill>
                 <a:latin typeface="Noto Sans Thai"/>
               </a:rPr>
-              <a:t>Body keywords</a:t>
+              <a:t>ตรวจเนื้อหา</a:t>
             </a:r>
             <a:r>
               <a:rPr sz="1200" b="0">
@@ -33244,7 +33193,7 @@
                 </a:solidFill>
                 <a:latin typeface="Noto Sans Thai"/>
               </a:rPr>
-              <a:t> — ตรวจจากเนื้อหาไฟล์</a:t>
+              <a:t> — อ่านข้อความในไฟล์ช่วยตัดสิน</a:t>
             </a:r>
           </a:p>
           <a:p>
@@ -33272,7 +33221,7 @@
                 </a:solidFill>
                 <a:latin typeface="Noto Sans Thai"/>
               </a:rPr>
-              <a:t>Re-process</a:t>
+              <a:t>ทำใหม่ได้</a:t>
             </a:r>
             <a:r>
               <a:rPr sz="1200" b="0">
@@ -33281,7 +33230,7 @@
                 </a:solidFill>
                 <a:latin typeface="Noto Sans Thai"/>
               </a:rPr>
-              <a:t> — mapping ผิด? ทำใหม่ได้</a:t>
+              <a:t> — จับคู่ผิด? สั่งประมวลผลซ้ำ</a:t>
             </a:r>
           </a:p>
           <a:p>
@@ -33309,7 +33258,7 @@
                 </a:solidFill>
                 <a:latin typeface="Noto Sans Thai"/>
               </a:rPr>
-              <a:t>NLP</a:t>
+              <a:t>ดึงข้อมูลอัตโนมัติ</a:t>
             </a:r>
             <a:r>
               <a:rPr sz="1200" b="0">
@@ -33318,7 +33267,7 @@
                 </a:solidFill>
                 <a:latin typeface="Noto Sans Thai"/>
               </a:rPr>
-              <a:t> — ชื่อไทย, เบอร์, บัตร ปชช., PromptPay</a:t>
+              <a:t> — ชื่อไทย, เบอร์โทร, บัตร ปชช., พร้อมเพย์</a:t>
             </a:r>
           </a:p>
         </p:txBody>
@@ -33414,7 +33363,7 @@
                 </a:solidFill>
                 <a:latin typeface="Noto Sans Thai"/>
               </a:rPr>
-              <a:t>กราฟเครือข่าย — mini i2 Analyst's Notebook</a:t>
+              <a:t>แผนภาพเครือข่ายการเงิน — แบบ i2</a:t>
             </a:r>
           </a:p>
         </p:txBody>
@@ -33449,7 +33398,7 @@
                 </a:solidFill>
                 <a:latin typeface="Noto Sans Thai"/>
               </a:rPr>
-              <a:t>Link Chart 815 บรรทัด — Interactive Multi-hop Expand ไม่จำกัดความลึก</a:t>
+              <a:t>แผนภาพเชื่อมโยงแบบโต้ตอบ — กดขยายได้ไม่จำกัด</a:t>
             </a:r>
           </a:p>
         </p:txBody>
@@ -33527,7 +33476,7 @@
                 </a:solidFill>
                 <a:latin typeface="Noto Sans Thai"/>
               </a:rPr>
-              <a:t>Multi-hop Link Chart</a:t>
+              <a:t>แผนภาพเชื่อมโยงแบบโต้ตอบ</a:t>
             </a:r>
           </a:p>
         </p:txBody>
@@ -33578,7 +33527,7 @@
                 </a:solidFill>
                 <a:latin typeface="Noto Sans Thai"/>
               </a:rPr>
-              <a:t>กดขยายเครือข่าย</a:t>
+              <a:t>กดที่บัญชีใดก็ได้ </a:t>
             </a:r>
             <a:r>
               <a:rPr sz="1200" b="1">
@@ -33587,7 +33536,7 @@
                 </a:solidFill>
                 <a:latin typeface="Noto Sans Thai"/>
               </a:rPr>
-              <a:t>ทีละชั้น ไม่จำกัดความลึก</a:t>
+              <a:t>ขยายเห็นเครือข่ายต่อได้เรื่อยๆ</a:t>
             </a:r>
           </a:p>
           <a:p>
@@ -33615,7 +33564,7 @@
                 </a:solidFill>
                 <a:latin typeface="Noto Sans Thai"/>
               </a:rPr>
-              <a:t>5 Layout</a:t>
+              <a:t>5 รูปแบบการจัด</a:t>
             </a:r>
             <a:r>
               <a:rPr sz="1200" b="0">
@@ -33624,7 +33573,7 @@
                 </a:solidFill>
                 <a:latin typeface="Noto Sans Thai"/>
               </a:rPr>
-              <a:t>: Circle, Spread, Compact, Hierarchy, Peacock</a:t>
+              <a:t>: วงกลม, กระจาย, กระชับ, ลำดับชั้น, พัด</a:t>
             </a:r>
           </a:p>
           <a:p>
@@ -33652,7 +33601,7 @@
                 </a:solidFill>
                 <a:latin typeface="Noto Sans Thai"/>
               </a:rPr>
-              <a:t>Conditional Formatting</a:t>
+              <a:t>ขนาดจุดตามยอดเงิน</a:t>
             </a:r>
             <a:r>
               <a:rPr sz="1200" b="0">
@@ -33661,7 +33610,7 @@
                 </a:solidFill>
                 <a:latin typeface="Noto Sans Thai"/>
               </a:rPr>
-              <a:t> — ขนาด node ตามยอดเงิน</a:t>
+              <a:t> — ยอดมาก จุดใหญ่</a:t>
             </a:r>
           </a:p>
           <a:p>
@@ -33683,31 +33632,22 @@
               <a:t>● </a:t>
             </a:r>
             <a:r>
+              <a:rPr sz="1200" b="1">
+                <a:solidFill>
+                  <a:srgbClr val="FFFFFF"/>
+                </a:solidFill>
+                <a:latin typeface="Noto Sans Thai"/>
+              </a:rPr>
+              <a:t>สีขอบตามระดับเสี่ยง</a:t>
+            </a:r>
+            <a:r>
               <a:rPr sz="1200" b="0">
                 <a:solidFill>
                   <a:srgbClr val="FFFFFF"/>
                 </a:solidFill>
                 <a:latin typeface="Noto Sans Thai"/>
               </a:rPr>
-              <a:t>สี border ตาม</a:t>
-            </a:r>
-            <a:r>
-              <a:rPr sz="1200" b="1">
-                <a:solidFill>
-                  <a:srgbClr val="FFFFFF"/>
-                </a:solidFill>
-                <a:latin typeface="Noto Sans Thai"/>
-              </a:rPr>
-              <a:t>ระดับความเสี่ยง</a:t>
-            </a:r>
-            <a:r>
-              <a:rPr sz="1200" b="0">
-                <a:solidFill>
-                  <a:srgbClr val="FFFFFF"/>
-                </a:solidFill>
-                <a:latin typeface="Noto Sans Thai"/>
-              </a:rPr>
-              <a:t>จาก alert</a:t>
+              <a:t> — แดง = น่าสงสัยมาก</a:t>
             </a:r>
           </a:p>
           <a:p>
@@ -33735,7 +33675,7 @@
                 </a:solidFill>
                 <a:latin typeface="Noto Sans Thai"/>
               </a:rPr>
-              <a:t>Edge labels</a:t>
+              <a:t>แสดงยอดเงิน</a:t>
             </a:r>
             <a:r>
               <a:rPr sz="1200" b="0">
@@ -33744,7 +33684,7 @@
                 </a:solidFill>
                 <a:latin typeface="Noto Sans Thai"/>
               </a:rPr>
-              <a:t> แสดง/ซ่อนยอดเงินบน edge</a:t>
+              <a:t>บนเส้นเชื่อมได้</a:t>
             </a:r>
           </a:p>
           <a:p>
@@ -33772,7 +33712,7 @@
                 </a:solidFill>
                 <a:latin typeface="Noto Sans Thai"/>
               </a:rPr>
-              <a:t>Pin / Hide / Multi-select</a:t>
+              <a:t>ปักหมุด / ซ่อน / เลือกหลายจุด</a:t>
             </a:r>
             <a:r>
               <a:rPr sz="1200" b="0">
@@ -33781,7 +33721,7 @@
                 </a:solidFill>
                 <a:latin typeface="Noto Sans Thai"/>
               </a:rPr>
-              <a:t> จัดระเบียบกราฟ</a:t>
+              <a:t> จัดระเบียบได้</a:t>
             </a:r>
           </a:p>
           <a:p>
@@ -33809,7 +33749,7 @@
                 </a:solidFill>
                 <a:latin typeface="Noto Sans Thai"/>
               </a:rPr>
-              <a:t>Focus History</a:t>
+              <a:t>ประวัติการค้นหา</a:t>
             </a:r>
             <a:r>
               <a:rPr sz="1200" b="0">
@@ -33818,7 +33758,7 @@
                 </a:solidFill>
                 <a:latin typeface="Noto Sans Thai"/>
               </a:rPr>
-              <a:t> — ดูประวัติการสำรวจ node</a:t>
+              <a:t> — ย้อนดูจุดที่เคยดูได้</a:t>
             </a:r>
           </a:p>
           <a:p>
@@ -33846,7 +33786,7 @@
                 </a:solidFill>
                 <a:latin typeface="Noto Sans Thai"/>
               </a:rPr>
-              <a:t>Export PNG</a:t>
+              <a:t>บันทึกเป็นรูปภาพ</a:t>
             </a:r>
             <a:r>
               <a:rPr sz="1200" b="0">
@@ -33855,7 +33795,7 @@
                 </a:solidFill>
                 <a:latin typeface="Noto Sans Thai"/>
               </a:rPr>
-              <a:t> สำหรับใช้ในรายงาน</a:t>
+              <a:t> ใส่รายงานได้ทันที</a:t>
             </a:r>
           </a:p>
         </p:txBody>
@@ -33933,7 +33873,7 @@
                 </a:solidFill>
                 <a:latin typeface="Noto Sans Thai"/>
               </a:rPr>
-              <a:t>SNA + Path Tracing</a:t>
+              <a:t>วิเคราะห์เครือข่าย + ติดตามเส้นทางเงิน</a:t>
             </a:r>
           </a:p>
         </p:txBody>
@@ -33984,7 +33924,7 @@
                 </a:solidFill>
                 <a:latin typeface="Noto Sans Thai"/>
               </a:rPr>
-              <a:t>Degree Centrality</a:t>
+              <a:t>บัญชีที่เชื่อมต่อมากที่สุด</a:t>
             </a:r>
             <a:r>
               <a:rPr sz="1200" b="0">
@@ -33993,7 +33933,7 @@
                 </a:solidFill>
                 <a:latin typeface="Noto Sans Thai"/>
               </a:rPr>
-              <a:t> — บัญชีเชื่อมต่อมากสุด</a:t>
+              <a:t> — ศูนย์กลางเครือข่าย</a:t>
             </a:r>
           </a:p>
           <a:p>
@@ -34021,7 +33961,7 @@
                 </a:solidFill>
                 <a:latin typeface="Noto Sans Thai"/>
               </a:rPr>
-              <a:t>Betweenness</a:t>
+              <a:t>บัญชีตัวกลาง</a:t>
             </a:r>
             <a:r>
               <a:rPr sz="1200" b="0">
@@ -34030,25 +33970,7 @@
                 </a:solidFill>
                 <a:latin typeface="Noto Sans Thai"/>
               </a:rPr>
-              <a:t> — บัญชี</a:t>
-            </a:r>
-            <a:r>
-              <a:rPr sz="1200" b="1">
-                <a:solidFill>
-                  <a:srgbClr val="FFFFFF"/>
-                </a:solidFill>
-                <a:latin typeface="Noto Sans Thai"/>
-              </a:rPr>
-              <a:t>ตัวกลาง</a:t>
-            </a:r>
-            <a:r>
-              <a:rPr sz="1200" b="0">
-                <a:solidFill>
-                  <a:srgbClr val="FFFFFF"/>
-                </a:solidFill>
-                <a:latin typeface="Noto Sans Thai"/>
-              </a:rPr>
-              <a:t> (broker)</a:t>
+              <a:t> — คนกลางที่เงินผ่านบ่อย</a:t>
             </a:r>
           </a:p>
           <a:p>
@@ -34076,16 +33998,7 @@
                 </a:solidFill>
                 <a:latin typeface="Noto Sans Thai"/>
               </a:rPr>
-              <a:t>Closeness</a:t>
-            </a:r>
-            <a:r>
-              <a:rPr sz="1200" b="0">
-                <a:solidFill>
-                  <a:srgbClr val="FFFFFF"/>
-                </a:solidFill>
-                <a:latin typeface="Noto Sans Thai"/>
-              </a:rPr>
-              <a:t> — เข้าถึงทุกจุดเร็วสุด</a:t>
+              <a:t>บัญชีที่เข้าถึงทุกคนเร็วที่สุด</a:t>
             </a:r>
           </a:p>
           <a:p>
@@ -34113,7 +34026,7 @@
                 </a:solidFill>
                 <a:latin typeface="Noto Sans Thai"/>
               </a:rPr>
-              <a:t>BFS Path Finder</a:t>
+              <a:t>ติดตามเส้นทางเงิน</a:t>
             </a:r>
             <a:r>
               <a:rPr sz="1200" b="0">
@@ -34122,7 +34035,7 @@
                 </a:solidFill>
                 <a:latin typeface="Noto Sans Thai"/>
               </a:rPr>
-              <a:t> — ตามเงิน A→B→C→D </a:t>
+              <a:t> — ตามได้สูงสุด </a:t>
             </a:r>
             <a:r>
               <a:rPr sz="1200" b="1">
@@ -34159,7 +34072,7 @@
                 </a:solidFill>
                 <a:latin typeface="Noto Sans Thai"/>
               </a:rPr>
-              <a:t>Graph Annotations</a:t>
+              <a:t>จดบันทึก</a:t>
             </a:r>
             <a:r>
               <a:rPr sz="1200" b="0">
@@ -34168,7 +34081,7 @@
                 </a:solidFill>
                 <a:latin typeface="Noto Sans Thai"/>
               </a:rPr>
-              <a:t> — จดบันทึกบน node ได้</a:t>
+              <a:t> — เขียนโน้ตบนจุดบัญชีได้</a:t>
             </a:r>
           </a:p>
           <a:p>
@@ -34196,7 +34109,7 @@
                 </a:solidFill>
                 <a:latin typeface="Noto Sans Thai"/>
               </a:rPr>
-              <a:t>Tags</a:t>
+              <a:t>ติดป้าย</a:t>
             </a:r>
             <a:r>
               <a:rPr sz="1200" b="0">
@@ -34233,7 +34146,7 @@
                 </a:solidFill>
                 <a:latin typeface="Noto Sans Thai"/>
               </a:rPr>
-              <a:t>Workspace</a:t>
+              <a:t>พื้นที่ทำงาน</a:t>
             </a:r>
             <a:r>
               <a:rPr sz="1200" b="0">
@@ -34242,7 +34155,7 @@
                 </a:solidFill>
                 <a:latin typeface="Noto Sans Thai"/>
               </a:rPr>
-              <a:t> — บันทึก/โหลด chart state</a:t>
+              <a:t> — บันทึกแผนภาพไว้ดูทีหลังได้</a:t>
             </a:r>
           </a:p>
           <a:p>
@@ -34270,7 +34183,7 @@
                 </a:solidFill>
                 <a:latin typeface="Noto Sans Thai"/>
               </a:rPr>
-              <a:t>Entity Profile</a:t>
+              <a:t>ประวัติบุคคล</a:t>
             </a:r>
             <a:r>
               <a:rPr sz="1200" b="0">
@@ -34279,7 +34192,7 @@
                 </a:solidFill>
                 <a:latin typeface="Noto Sans Thai"/>
               </a:rPr>
-              <a:t> — หน้ารวมข้อมูลบุคคล/บัญชี</a:t>
+              <a:t> — หน้ารวมข้อมูลทุกบัญชีของคนเดียวกัน</a:t>
             </a:r>
           </a:p>
         </p:txBody>
@@ -34375,7 +34288,7 @@
                 </a:solidFill>
                 <a:latin typeface="Noto Sans Thai"/>
               </a:rPr>
-              <a:t>การแสดงผล — Timeline, Heatmap, Dashboard</a:t>
+              <a:t>การแสดงผลข้อมูล — กราฟเวลา, แผนที่ความร้อน, หน้าสรุป</a:t>
             </a:r>
           </a:p>
         </p:txBody>
@@ -34455,7 +34368,7 @@
                 </a:solidFill>
                 <a:latin typeface="Noto Sans Thai"/>
               </a:rPr>
-              <a:t>Timeline Chart</a:t>
+              <a:t>กราฟเวลา</a:t>
             </a:r>
           </a:p>
         </p:txBody>
@@ -34506,7 +34419,7 @@
                 </a:solidFill>
                 <a:latin typeface="Noto Sans Thai"/>
               </a:rPr>
-              <a:t>Recharts</a:t>
+              <a:t>แท่งกราฟ + จุด</a:t>
             </a:r>
             <a:r>
               <a:rPr sz="1300" b="0">
@@ -34515,7 +34428,7 @@
                 </a:solidFill>
                 <a:latin typeface="Noto Sans Thai"/>
               </a:rPr>
-              <a:t> — Bar + Dot mode</a:t>
+              <a:t> แสดงธุรกรรมตามวัน</a:t>
             </a:r>
           </a:p>
           <a:p>
@@ -34543,7 +34456,7 @@
                 </a:solidFill>
                 <a:latin typeface="Noto Sans Thai"/>
               </a:rPr>
-              <a:t>Granularity: </a:t>
+              <a:t>เลือกดูได้: </a:t>
             </a:r>
             <a:r>
               <a:rPr sz="1300" b="1">
@@ -34552,7 +34465,7 @@
                 </a:solidFill>
                 <a:latin typeface="Noto Sans Thai"/>
               </a:rPr>
-              <a:t>วัน / สัปดาห์ / เดือน</a:t>
+              <a:t>รายวัน / รายสัปดาห์ / รายเดือน</a:t>
             </a:r>
           </a:p>
           <a:p>
@@ -34608,7 +34521,7 @@
                 </a:solidFill>
                 <a:latin typeface="Noto Sans Thai"/>
               </a:rPr>
-              <a:t>ตรวจจับช่วงเวลาผิดปกติ</a:t>
+              <a:t>พบช่วงเวลาที่มีธุรกรรมผิดปกติ</a:t>
             </a:r>
           </a:p>
         </p:txBody>
@@ -34688,7 +34601,7 @@
                 </a:solidFill>
                 <a:latin typeface="Noto Sans Thai"/>
               </a:rPr>
-              <a:t>Time Wheel (Heatmap)</a:t>
+              <a:t>แผนที่ความร้อน</a:t>
             </a:r>
           </a:p>
         </p:txBody>
@@ -34739,16 +34652,7 @@
                 </a:solidFill>
                 <a:latin typeface="Noto Sans Thai"/>
               </a:rPr>
-              <a:t>Custom SVG</a:t>
-            </a:r>
-            <a:r>
-              <a:rPr sz="1300" b="0">
-                <a:solidFill>
-                  <a:srgbClr val="1A202C"/>
-                </a:solidFill>
-                <a:latin typeface="Noto Sans Thai"/>
-              </a:rPr>
-              <a:t> — Hour × Day</a:t>
+              <a:t>แสดงผลตาม ชั่วโมง × วัน</a:t>
             </a:r>
           </a:p>
           <a:p>
@@ -34776,7 +34680,7 @@
                 </a:solidFill>
                 <a:latin typeface="Noto Sans Thai"/>
               </a:rPr>
-              <a:t>24 ชม. × 7 วัน = </a:t>
+              <a:t>ครอบคลุม </a:t>
             </a:r>
             <a:r>
               <a:rPr sz="1300" b="1">
@@ -34785,7 +34689,7 @@
                 </a:solidFill>
                 <a:latin typeface="Noto Sans Thai"/>
               </a:rPr>
-              <a:t>168 ช่อง</a:t>
+              <a:t>24 ชม. × 7 วัน = 168 ช่อง</a:t>
             </a:r>
           </a:p>
           <a:p>
@@ -34807,13 +34711,22 @@
               <a:t>● </a:t>
             </a:r>
             <a:r>
+              <a:rPr sz="1300" b="1">
+                <a:solidFill>
+                  <a:srgbClr val="1A202C"/>
+                </a:solidFill>
+                <a:latin typeface="Noto Sans Thai"/>
+              </a:rPr>
+              <a:t>สีเข้ม = ธุรกรรมถี่</a:t>
+            </a:r>
+            <a:r>
               <a:rPr sz="1300" b="0">
                 <a:solidFill>
                   <a:srgbClr val="1A202C"/>
                 </a:solidFill>
                 <a:latin typeface="Noto Sans Thai"/>
               </a:rPr>
-              <a:t>สีตามความถี่ธุรกรรม</a:t>
+              <a:t> สีอ่อน = น้อย</a:t>
             </a:r>
           </a:p>
           <a:p>
@@ -34850,7 +34763,7 @@
                 </a:solidFill>
                 <a:latin typeface="Noto Sans Thai"/>
               </a:rPr>
-              <a:t> (ตี 2-5)</a:t>
+              <a:t> เช่น ตี 2-5</a:t>
             </a:r>
           </a:p>
         </p:txBody>
@@ -34930,7 +34843,7 @@
                 </a:solidFill>
                 <a:latin typeface="Noto Sans Thai"/>
               </a:rPr>
-              <a:t>Dashboard</a:t>
+              <a:t>หน้าสรุปภาพรวม</a:t>
             </a:r>
           </a:p>
         </p:txBody>
@@ -34990,7 +34903,7 @@
                 </a:solidFill>
                 <a:latin typeface="Noto Sans Thai"/>
               </a:rPr>
-              <a:t> — สถิติ, เงินเข้า/ออก</a:t>
+              <a:t> — จำนวนเงินเข้า/ออก, สถิติ</a:t>
             </a:r>
           </a:p>
           <a:p>
@@ -35018,7 +34931,7 @@
                 </a:solidFill>
                 <a:latin typeface="Noto Sans Thai"/>
               </a:rPr>
-              <a:t>Recent Activity</a:t>
+              <a:t>ธุรกรรมล่าสุด</a:t>
             </a:r>
             <a:r>
               <a:rPr sz="1300" b="0">
@@ -35027,7 +34940,7 @@
                 </a:solidFill>
                 <a:latin typeface="Noto Sans Thai"/>
               </a:rPr>
-              <a:t> — ธุรกรรมล่าสุด</a:t>
+              <a:t> — ดูรายการใหม่ได้ทันที</a:t>
             </a:r>
           </a:p>
           <a:p>
@@ -35055,7 +34968,7 @@
                 </a:solidFill>
                 <a:latin typeface="Noto Sans Thai"/>
               </a:rPr>
-              <a:t>Top Accounts</a:t>
+              <a:t>บัญชียอดสูงสุด</a:t>
             </a:r>
             <a:r>
               <a:rPr sz="1300" b="0">
@@ -35064,7 +34977,7 @@
                 </a:solidFill>
                 <a:latin typeface="Noto Sans Thai"/>
               </a:rPr>
-              <a:t> — บัญชียอดสูงสุด</a:t>
+              <a:t> — เรียงตามจำนวนเงิน</a:t>
             </a:r>
           </a:p>
           <a:p>
@@ -35092,7 +35005,7 @@
                 </a:solidFill>
                 <a:latin typeface="Noto Sans Thai"/>
               </a:rPr>
-              <a:t>Code-split</a:t>
+              <a:t>โหลดเร็ว</a:t>
             </a:r>
             <a:r>
               <a:rPr sz="1300" b="0">
@@ -35101,7 +35014,7 @@
                 </a:solidFill>
                 <a:latin typeface="Noto Sans Thai"/>
               </a:rPr>
-              <a:t> — React.lazy + Suspense</a:t>
+              <a:t> — แสดงผลเฉพาะส่วนที่ต้องการ</a:t>
             </a:r>
           </a:p>
         </p:txBody>
